--- a/pitch/Dhaal-HackX-submission.pptx
+++ b/pitch/Dhaal-HackX-submission.pptx
@@ -3418,57 +3418,93 @@
         <p:spPr>
           <a:xfrm>
             <a:off x="1524000" y="4472758"/>
-            <a:ext cx="9144000" cy="1655762"/>
+            <a:ext cx="9476232" cy="2385242"/>
           </a:xfrm>
         </p:spPr>
         <p:txBody>
           <a:bodyPr>
-            <a:normAutofit/>
+            <a:normAutofit fontScale="55000" lnSpcReduction="20000"/>
           </a:bodyPr>
           <a:lstStyle/>
           <a:p>
             <a:r>
-              <a:rPr lang="en-US" sz="1800" dirty="0" b="1">
-                <a:solidFill>
-                  <a:srgbClr val="156082"/>
-                </a:solidFill>
+              <a:rPr lang="en-US" sz="5200" b="1" dirty="0">
+                <a:solidFill>
+                  <a:srgbClr val="F29FF9"/>
+                </a:solidFill>
+                <a:latin typeface="Arial"/>
               </a:rPr>
               <a:t>Dhaal (ढाल) — the pre-payment scam shield for every Indian</a:t>
             </a:r>
           </a:p>
           <a:p>
             <a:r>
-              <a:rPr lang="en-US" sz="1800" dirty="0" b="0">
+              <a:rPr lang="en-US" sz="3300" b="0" dirty="0">
                 <a:solidFill>
                   <a:schemeClr val="bg1"/>
                 </a:solidFill>
+                <a:latin typeface="Calibri"/>
               </a:rPr>
-              <a:t>Team Name: [Your Team Name]</a:t>
-            </a:r>
-          </a:p>
-          <a:p>
-            <a:r>
-              <a:rPr lang="en-US" sz="1800" dirty="0" b="0">
+              <a:t>Team</a:t>
+            </a:r>
+            <a:r>
+              <a:rPr lang="en-US" sz="3300" b="0" dirty="0">
+                <a:solidFill>
+                  <a:srgbClr val="0E2841"/>
+                </a:solidFill>
+                <a:latin typeface="Calibri"/>
+              </a:rPr>
+              <a:t> </a:t>
+            </a:r>
+            <a:r>
+              <a:rPr lang="en-US" sz="3300" b="0" dirty="0">
                 <a:solidFill>
                   <a:schemeClr val="bg1"/>
                 </a:solidFill>
+                <a:latin typeface="Calibri"/>
+              </a:rPr>
+              <a:t>Name: </a:t>
+            </a:r>
+            <a:r>
+              <a:rPr lang="en-US" sz="3300" b="1" dirty="0">
+                <a:solidFill>
+                  <a:schemeClr val="bg1"/>
+                </a:solidFill>
+                <a:latin typeface="Calibri"/>
+              </a:rPr>
+              <a:t>ALL STARS</a:t>
+            </a:r>
+          </a:p>
+          <a:p>
+            <a:r>
+              <a:rPr lang="en-US" sz="3300" b="0" dirty="0">
+                <a:solidFill>
+                  <a:schemeClr val="bg1"/>
+                </a:solidFill>
+                <a:latin typeface="Calibri"/>
               </a:rPr>
               <a:t>Team ID: [Registration ID]</a:t>
             </a:r>
           </a:p>
           <a:p>
             <a:r>
-              <a:rPr lang="en-US" sz="1800" dirty="0" b="0">
+              <a:rPr lang="en-US" sz="3300" b="0" dirty="0">
                 <a:solidFill>
                   <a:schemeClr val="bg1"/>
                 </a:solidFill>
+                <a:latin typeface="Calibri"/>
               </a:rPr>
               <a:t>Problem Statement Selected: Consumer Protection Against Payment Scams (Fintech PS #7)</a:t>
             </a:r>
           </a:p>
           <a:p>
             <a:r>
-              <a:rPr b="0"/>
+              <a:rPr sz="3300" b="0" dirty="0">
+                <a:solidFill>
+                  <a:schemeClr val="bg1"/>
+                </a:solidFill>
+                <a:latin typeface="Calibri"/>
+              </a:rPr>
               <a:t>Theme: Fintech</a:t>
             </a:r>
           </a:p>
@@ -3867,8 +3903,8 @@
         </p:nvSpPr>
         <p:spPr>
           <a:xfrm>
-            <a:off x="822960" y="1874519"/>
-            <a:ext cx="10515600" cy="4663440"/>
+            <a:off x="822960" y="1783080"/>
+            <a:ext cx="10515600" cy="502920"/>
           </a:xfrm>
           <a:prstGeom prst="rect">
             <a:avLst/>
@@ -3876,126 +3912,359 @@
           <a:noFill/>
         </p:spPr>
         <p:txBody>
-          <a:bodyPr wrap="square">
+          <a:bodyPr wrap="square" lIns="0" tIns="0" rIns="0" bIns="0">
             <a:spAutoFit/>
           </a:bodyPr>
           <a:lstStyle/>
           <a:p>
-            <a:pPr>
+            <a:r>
+              <a:rPr sz="2700" b="1">
+                <a:solidFill>
+                  <a:srgbClr val="0E2841"/>
+                </a:solidFill>
+                <a:latin typeface="Arial Black"/>
+              </a:rPr>
+              <a:t>पैसे भेजने से पहले — एक जाँच।  </a:t>
+            </a:r>
+            <a:r>
+              <a:rPr sz="1900" b="1">
+                <a:solidFill>
+                  <a:srgbClr val="156082"/>
+                </a:solidFill>
+                <a:latin typeface="Arial Black"/>
+              </a:rPr>
+              <a:t>One check before you pay: paste it, photo it, or SPEAK it.</a:t>
+            </a:r>
+          </a:p>
+        </p:txBody>
+      </p:sp>
+      <p:sp>
+        <p:nvSpPr>
+          <p:cNvPr id="15" name="Rounded Rectangle 14"/>
+          <p:cNvSpPr/>
+          <p:nvPr/>
+        </p:nvSpPr>
+        <p:spPr>
+          <a:xfrm>
+            <a:off x="822960" y="2423160"/>
+            <a:ext cx="5074920" cy="1645920"/>
+          </a:xfrm>
+          <a:prstGeom prst="roundRect">
+            <a:avLst>
+              <a:gd name="adj" fmla="val 5500"/>
+            </a:avLst>
+          </a:prstGeom>
+          <a:solidFill>
+            <a:srgbClr val="FFFFFF"/>
+          </a:solidFill>
+          <a:ln w="31750">
+            <a:solidFill>
+              <a:srgbClr val="0E2841"/>
+            </a:solidFill>
+          </a:ln>
+          <a:effectLst/>
+        </p:spPr>
+        <p:style>
+          <a:lnRef idx="1">
+            <a:schemeClr val="accent1"/>
+          </a:lnRef>
+          <a:fillRef idx="3">
+            <a:schemeClr val="accent1"/>
+          </a:fillRef>
+          <a:effectRef idx="2">
+            <a:schemeClr val="accent1"/>
+          </a:effectRef>
+          <a:fontRef idx="minor">
+            <a:schemeClr val="lt1"/>
+          </a:fontRef>
+        </p:style>
+        <p:txBody>
+          <a:bodyPr wrap="square" lIns="146304" tIns="91440" rIns="146304" rtlCol="0" anchor="ctr"/>
+          <a:lstStyle/>
+          <a:p>
+            <a:pPr algn="ctr">
               <a:spcAft>
-                <a:spcPts val="600"/>
+                <a:spcPts val="400"/>
               </a:spcAft>
             </a:pPr>
             <a:r>
-              <a:rPr sz="2000" b="1">
+              <a:rPr sz="1900" b="1">
+                <a:solidFill>
+                  <a:srgbClr val="156082"/>
+                </a:solidFill>
+                <a:latin typeface="Arial Black"/>
+              </a:rPr>
+              <a:t>जाँच · Check</a:t>
+            </a:r>
+          </a:p>
+          <a:p>
+            <a:r>
+              <a:rPr sz="1200" b="0">
                 <a:solidFill>
                   <a:srgbClr val="0E2841"/>
                 </a:solidFill>
                 <a:latin typeface="Calibri"/>
               </a:rPr>
-              <a:t>ढाल Dhaal — पैसे भेजने से पहले, एक जाँच। One check before you pay.</a:t>
-            </a:r>
-          </a:p>
-          <a:p>
-            <a:pPr>
+              <a:t>Verdict + every weighted signal, in the user's language (हिं/EN toggle) — and spoken aloud. Never "safe", only "no known risk".</a:t>
+            </a:r>
+          </a:p>
+        </p:txBody>
+      </p:sp>
+      <p:sp>
+        <p:nvSpPr>
+          <p:cNvPr id="16" name="Rounded Rectangle 15"/>
+          <p:cNvSpPr/>
+          <p:nvPr/>
+        </p:nvSpPr>
+        <p:spPr>
+          <a:xfrm>
+            <a:off x="6263640" y="2423160"/>
+            <a:ext cx="5074920" cy="1645920"/>
+          </a:xfrm>
+          <a:prstGeom prst="roundRect">
+            <a:avLst>
+              <a:gd name="adj" fmla="val 5500"/>
+            </a:avLst>
+          </a:prstGeom>
+          <a:solidFill>
+            <a:srgbClr val="FFFFFF"/>
+          </a:solidFill>
+          <a:ln w="31750">
+            <a:solidFill>
+              <a:srgbClr val="0E2841"/>
+            </a:solidFill>
+          </a:ln>
+          <a:effectLst/>
+        </p:spPr>
+        <p:style>
+          <a:lnRef idx="1">
+            <a:schemeClr val="accent1"/>
+          </a:lnRef>
+          <a:fillRef idx="3">
+            <a:schemeClr val="accent1"/>
+          </a:fillRef>
+          <a:effectRef idx="2">
+            <a:schemeClr val="accent1"/>
+          </a:effectRef>
+          <a:fontRef idx="minor">
+            <a:schemeClr val="lt1"/>
+          </a:fontRef>
+        </p:style>
+        <p:txBody>
+          <a:bodyPr wrap="square" lIns="146304" tIns="91440" rIns="146304" rtlCol="0" anchor="ctr"/>
+          <a:lstStyle/>
+          <a:p>
+            <a:pPr algn="ctr">
               <a:spcAft>
-                <a:spcPts val="300"/>
+                <a:spcPts val="400"/>
               </a:spcAft>
             </a:pPr>
             <a:r>
-              <a:rPr sz="1450">
+              <a:rPr sz="1900" b="1">
+                <a:solidFill>
+                  <a:srgbClr val="156082"/>
+                </a:solidFill>
+                <a:latin typeface="Arial Black"/>
+              </a:rPr>
+              <a:t>परिवार की ढाल · Guardian</a:t>
+            </a:r>
+          </a:p>
+          <a:p>
+            <a:r>
+              <a:rPr sz="1200" b="0">
                 <a:solidFill>
                   <a:srgbClr val="0E2841"/>
                 </a:solidFill>
                 <a:latin typeface="Calibri"/>
               </a:rPr>
-              <a:t>Paste any message, link, UPI ID or number — photograph a QR — or just SPEAK the call in Hindi. Dhaal returns a verdict with every reason, in the user's language, and speaks the warning back.</a:t>
-            </a:r>
-          </a:p>
-          <a:p>
-            <a:pPr>
-              <a:spcBef>
-                <a:spcPts val="1000"/>
-              </a:spcBef>
+              <a:t>An elderly user's risky payment pings family for a 10-second Allow/Block. Every check visible; dignity intact — risk, never transactions.</a:t>
+            </a:r>
+          </a:p>
+        </p:txBody>
+      </p:sp>
+      <p:sp>
+        <p:nvSpPr>
+          <p:cNvPr id="17" name="Rounded Rectangle 16"/>
+          <p:cNvSpPr/>
+          <p:nvPr/>
+        </p:nvSpPr>
+        <p:spPr>
+          <a:xfrm>
+            <a:off x="822960" y="4206240"/>
+            <a:ext cx="5074920" cy="1645920"/>
+          </a:xfrm>
+          <a:prstGeom prst="roundRect">
+            <a:avLst>
+              <a:gd name="adj" fmla="val 5500"/>
+            </a:avLst>
+          </a:prstGeom>
+          <a:solidFill>
+            <a:srgbClr val="FFFFFF"/>
+          </a:solidFill>
+          <a:ln w="31750">
+            <a:solidFill>
+              <a:srgbClr val="0E2841"/>
+            </a:solidFill>
+          </a:ln>
+          <a:effectLst/>
+        </p:spPr>
+        <p:style>
+          <a:lnRef idx="1">
+            <a:schemeClr val="accent1"/>
+          </a:lnRef>
+          <a:fillRef idx="3">
+            <a:schemeClr val="accent1"/>
+          </a:fillRef>
+          <a:effectRef idx="2">
+            <a:schemeClr val="accent1"/>
+          </a:effectRef>
+          <a:fontRef idx="minor">
+            <a:schemeClr val="lt1"/>
+          </a:fontRef>
+        </p:style>
+        <p:txBody>
+          <a:bodyPr wrap="square" lIns="146304" tIns="91440" rIns="146304" rtlCol="0" anchor="ctr"/>
+          <a:lstStyle/>
+          <a:p>
+            <a:pPr algn="ctr">
               <a:spcAft>
-                <a:spcPts val="200"/>
+                <a:spcPts val="400"/>
               </a:spcAft>
             </a:pPr>
             <a:r>
-              <a:rPr sz="1700" b="1">
+              <a:rPr sz="1900" b="1">
                 <a:solidFill>
                   <a:srgbClr val="156082"/>
+                </a:solidFill>
+                <a:latin typeface="Arial Black"/>
+              </a:rPr>
+              <a:t>धोखों का नक्शा · Intel</a:t>
+            </a:r>
+          </a:p>
+          <a:p>
+            <a:r>
+              <a:rPr sz="1200" b="0">
+                <a:solidFill>
+                  <a:srgbClr val="0E2841"/>
                 </a:solidFill>
                 <a:latin typeface="Calibri"/>
               </a:rPr>
-              <a:t>Four surfaces, one shield</a:t>
-            </a:r>
-          </a:p>
-          <a:p>
-            <a:pPr>
+              <a:t>Report → human verify → everyone's live blocklist. A scam burned in Jaipur today can't work in Jodhpur tomorrow.</a:t>
+            </a:r>
+          </a:p>
+        </p:txBody>
+      </p:sp>
+      <p:sp>
+        <p:nvSpPr>
+          <p:cNvPr id="18" name="Rounded Rectangle 17"/>
+          <p:cNvSpPr/>
+          <p:nvPr/>
+        </p:nvSpPr>
+        <p:spPr>
+          <a:xfrm>
+            <a:off x="6263640" y="4206240"/>
+            <a:ext cx="5074920" cy="1645920"/>
+          </a:xfrm>
+          <a:prstGeom prst="roundRect">
+            <a:avLst>
+              <a:gd name="adj" fmla="val 5500"/>
+            </a:avLst>
+          </a:prstGeom>
+          <a:solidFill>
+            <a:srgbClr val="FFFFFF"/>
+          </a:solidFill>
+          <a:ln w="31750">
+            <a:solidFill>
+              <a:srgbClr val="0E2841"/>
+            </a:solidFill>
+          </a:ln>
+          <a:effectLst/>
+        </p:spPr>
+        <p:style>
+          <a:lnRef idx="1">
+            <a:schemeClr val="accent1"/>
+          </a:lnRef>
+          <a:fillRef idx="3">
+            <a:schemeClr val="accent1"/>
+          </a:fillRef>
+          <a:effectRef idx="2">
+            <a:schemeClr val="accent1"/>
+          </a:effectRef>
+          <a:fontRef idx="minor">
+            <a:schemeClr val="lt1"/>
+          </a:fontRef>
+        </p:style>
+        <p:txBody>
+          <a:bodyPr wrap="square" lIns="146304" tIns="91440" rIns="146304" rtlCol="0" anchor="ctr"/>
+          <a:lstStyle/>
+          <a:p>
+            <a:pPr algn="ctr">
               <a:spcAft>
-                <a:spcPts val="300"/>
+                <a:spcPts val="400"/>
               </a:spcAft>
             </a:pPr>
             <a:r>
-              <a:rPr sz="1450">
+              <a:rPr sz="1900" b="1">
+                <a:solidFill>
+                  <a:srgbClr val="156082"/>
+                </a:solidFill>
+                <a:latin typeface="Arial Black"/>
+              </a:rPr>
+              <a:t>पहला घंटा · Recover</a:t>
+            </a:r>
+          </a:p>
+          <a:p>
+            <a:r>
+              <a:rPr sz="1200" b="0">
                 <a:solidFill>
                   <a:srgbClr val="0E2841"/>
                 </a:solidFill>
                 <a:latin typeface="Calibri"/>
               </a:rPr>
-              <a:t>जाँच Check — verdict + weighted signals, spoken aloud (Hindi/English toggle) · परिवार की ढाल Guardian — an elderly user's risky payment pings family for a 10-second Allow/Block · धोखों का नक्शा Intel — community reports become everyone's live blocklist · पहला घंटा Recover — 1930 script + cybercrime.gov.in complaint + bank letter, auto-drafted in Hindi.</a:t>
-            </a:r>
-          </a:p>
-          <a:p>
-            <a:pPr>
-              <a:spcBef>
-                <a:spcPts val="1000"/>
-              </a:spcBef>
-              <a:spcAft>
-                <a:spcPts val="200"/>
-              </a:spcAft>
-            </a:pPr>
+              <a:t>1930 call script + cybercrime.gov.in complaint + bank letter — auto-drafted in Hindi, in the golden hour that gets money back.</a:t>
+            </a:r>
+          </a:p>
+        </p:txBody>
+      </p:sp>
+      <p:sp>
+        <p:nvSpPr>
+          <p:cNvPr id="19" name="TextBox 18"/>
+          <p:cNvSpPr txBox="1"/>
+          <p:nvPr/>
+        </p:nvSpPr>
+        <p:spPr>
+          <a:xfrm>
+            <a:off x="822960" y="6053328"/>
+            <a:ext cx="10515600" cy="457200"/>
+          </a:xfrm>
+          <a:prstGeom prst="rect">
+            <a:avLst/>
+          </a:prstGeom>
+          <a:noFill/>
+        </p:spPr>
+        <p:txBody>
+          <a:bodyPr wrap="square" lIns="0" tIns="0" rIns="0" bIns="0">
+            <a:spAutoFit/>
+          </a:bodyPr>
+          <a:lstStyle/>
+          <a:p>
             <a:r>
               <a:rPr sz="1700" b="1">
                 <a:solidFill>
-                  <a:srgbClr val="156082"/>
-                </a:solidFill>
-                <a:latin typeface="Calibri"/>
+                  <a:srgbClr val="0E2841"/>
+                </a:solidFill>
+                <a:latin typeface="Arial Black"/>
               </a:rPr>
-              <a:t>Why it's different</a:t>
-            </a:r>
-          </a:p>
-          <a:p>
-            <a:pPr>
-              <a:spcAft>
-                <a:spcPts val="300"/>
-              </a:spcAft>
-            </a:pPr>
-            <a:r>
-              <a:rPr sz="1450">
-                <a:solidFill>
-                  <a:srgbClr val="0E2841"/>
-                </a:solidFill>
-                <a:latin typeface="Calibri"/>
+              <a:t>The verdict is computed by rules — the AI explains it, and can never change it.   </a:t>
+            </a:r>
+            <a:r>
+              <a:rPr sz="1700" b="1">
+                <a:solidFill>
+                  <a:srgbClr val="C62828"/>
+                </a:solidFill>
+                <a:latin typeface="Arial Black"/>
               </a:rPr>
-              <a:t>The verdict is computed by a deterministic rule engine — the AI only explains it and can never change it. Dhaal never says "safe", only "no known risk". Every confirmed report instantly strengthens every other user's shield.</a:t>
-            </a:r>
-          </a:p>
-          <a:p>
-            <a:pPr>
-              <a:spcBef>
-                <a:spcPts val="800"/>
-              </a:spcBef>
-            </a:pPr>
-            <a:r>
-              <a:rPr sz="1600" b="1">
-                <a:solidFill>
-                  <a:srgbClr val="C62828"/>
-                </a:solidFill>
-                <a:latin typeface="Calibri"/>
-              </a:rPr>
-              <a:t>Live now: dhaal-delta.vercel.app — judges can check their own inbox during Q&amp;A.</a:t>
+              <a:t>LIVE: dhaal-delta.vercel.app — check your own inbox in Q&amp;A.</a:t>
             </a:r>
           </a:p>
         </p:txBody>
@@ -4333,8 +4602,8 @@
         </p:nvSpPr>
         <p:spPr>
           <a:xfrm>
-            <a:off x="822960" y="1874519"/>
-            <a:ext cx="10515600" cy="4663440"/>
+            <a:off x="822960" y="1783080"/>
+            <a:ext cx="10515600" cy="685800"/>
           </a:xfrm>
           <a:prstGeom prst="rect">
             <a:avLst/>
@@ -4342,129 +4611,493 @@
           <a:noFill/>
         </p:spPr>
         <p:txBody>
-          <a:bodyPr wrap="square">
+          <a:bodyPr wrap="square" lIns="0" tIns="0" rIns="0" bIns="0">
             <a:spAutoFit/>
           </a:bodyPr>
           <a:lstStyle/>
           <a:p>
             <a:pPr>
-              <a:spcBef>
-                <a:spcPts val="1000"/>
-              </a:spcBef>
               <a:spcAft>
-                <a:spcPts val="200"/>
+                <a:spcPts val="400"/>
               </a:spcAft>
             </a:pPr>
             <a:r>
-              <a:rPr sz="1700" b="1">
-                <a:solidFill>
-                  <a:srgbClr val="156082"/>
+              <a:rPr sz="1500" b="0">
+                <a:solidFill>
+                  <a:srgbClr val="0E2841"/>
                 </a:solidFill>
                 <a:latin typeface="Calibri"/>
               </a:rPr>
-              <a:t>Stack</a:t>
-            </a:r>
-          </a:p>
+              <a:t>Next.js PWA (Vercel) · FastAPI on Vercel Python · MongoDB Atlas · Claude claude-sonnet-5 · Sarvam AI (Saarika ASR + Bulbul TTS) · jsQR on-device</a:t>
+            </a:r>
+          </a:p>
+        </p:txBody>
+      </p:sp>
+      <p:sp>
+        <p:nvSpPr>
+          <p:cNvPr id="11" name="Rounded Rectangle 10"/>
+          <p:cNvSpPr/>
+          <p:nvPr/>
+        </p:nvSpPr>
+        <p:spPr>
+          <a:xfrm>
+            <a:off x="822960" y="2514600"/>
+            <a:ext cx="2286000" cy="1417320"/>
+          </a:xfrm>
+          <a:prstGeom prst="roundRect">
+            <a:avLst>
+              <a:gd name="adj" fmla="val 8000"/>
+            </a:avLst>
+          </a:prstGeom>
+          <a:solidFill>
+            <a:srgbClr val="FFFFFF"/>
+          </a:solidFill>
+          <a:ln w="28575">
+            <a:solidFill>
+              <a:srgbClr val="0E2841"/>
+            </a:solidFill>
+          </a:ln>
+          <a:effectLst/>
+        </p:spPr>
+        <p:style>
+          <a:lnRef idx="1">
+            <a:schemeClr val="accent1"/>
+          </a:lnRef>
+          <a:fillRef idx="3">
+            <a:schemeClr val="accent1"/>
+          </a:fillRef>
+          <a:effectRef idx="2">
+            <a:schemeClr val="accent1"/>
+          </a:effectRef>
+          <a:fontRef idx="minor">
+            <a:schemeClr val="lt1"/>
+          </a:fontRef>
+        </p:style>
+        <p:txBody>
+          <a:bodyPr wrap="square" lIns="109728" tIns="54864" rIns="109728" bIns="54864" rtlCol="0" anchor="ctr"/>
+          <a:lstStyle/>
+          <a:p>
+            <a:pPr algn="ctr"/>
+            <a:r>
+              <a:rPr sz="1700" b="1">
+                <a:solidFill>
+                  <a:srgbClr val="0E2841"/>
+                </a:solidFill>
+                <a:latin typeface="Arial Black"/>
+              </a:rPr>
+              <a:t>INPUT</a:t>
+            </a:r>
+          </a:p>
+          <a:p>
+            <a:pPr algn="ctr"/>
+            <a:r>
+              <a:rPr sz="1000" b="0">
+                <a:solidFill>
+                  <a:srgbClr val="515E6E"/>
+                </a:solidFill>
+                <a:latin typeface="Calibri"/>
+              </a:rPr>
+              <a:t>text · URL · UPI · QR (on-device) · voice ASR</a:t>
+            </a:r>
+          </a:p>
+        </p:txBody>
+      </p:sp>
+      <p:sp>
+        <p:nvSpPr>
+          <p:cNvPr id="12" name="Right Arrow 11"/>
+          <p:cNvSpPr/>
+          <p:nvPr/>
+        </p:nvSpPr>
+        <p:spPr>
+          <a:xfrm>
+            <a:off x="3200400" y="2999232"/>
+            <a:ext cx="411480" cy="457200"/>
+          </a:xfrm>
+          <a:prstGeom prst="rightArrow">
+            <a:avLst/>
+          </a:prstGeom>
+          <a:solidFill>
+            <a:srgbClr val="E8A13B"/>
+          </a:solidFill>
+          <a:ln>
+            <a:noFill/>
+          </a:ln>
+          <a:effectLst/>
+        </p:spPr>
+        <p:style>
+          <a:lnRef idx="1">
+            <a:schemeClr val="accent1"/>
+          </a:lnRef>
+          <a:fillRef idx="3">
+            <a:schemeClr val="accent1"/>
+          </a:fillRef>
+          <a:effectRef idx="2">
+            <a:schemeClr val="accent1"/>
+          </a:effectRef>
+          <a:fontRef idx="minor">
+            <a:schemeClr val="lt1"/>
+          </a:fontRef>
+        </p:style>
+        <p:txBody>
+          <a:bodyPr rtlCol="0" anchor="ctr"/>
+          <a:lstStyle/>
+          <a:p>
+            <a:pPr algn="ctr"/>
+            <a:endParaRPr/>
+          </a:p>
+        </p:txBody>
+      </p:sp>
+      <p:sp>
+        <p:nvSpPr>
+          <p:cNvPr id="13" name="Rounded Rectangle 12"/>
+          <p:cNvSpPr/>
+          <p:nvPr/>
+        </p:nvSpPr>
+        <p:spPr>
+          <a:xfrm>
+            <a:off x="3703320" y="2377440"/>
+            <a:ext cx="4114800" cy="1691640"/>
+          </a:xfrm>
+          <a:prstGeom prst="roundRect">
+            <a:avLst>
+              <a:gd name="adj" fmla="val 8000"/>
+            </a:avLst>
+          </a:prstGeom>
+          <a:solidFill>
+            <a:srgbClr val="C62828"/>
+          </a:solidFill>
+          <a:ln w="28575">
+            <a:solidFill>
+              <a:srgbClr val="C62828"/>
+            </a:solidFill>
+          </a:ln>
+          <a:effectLst/>
+        </p:spPr>
+        <p:style>
+          <a:lnRef idx="1">
+            <a:schemeClr val="accent1"/>
+          </a:lnRef>
+          <a:fillRef idx="3">
+            <a:schemeClr val="accent1"/>
+          </a:fillRef>
+          <a:effectRef idx="2">
+            <a:schemeClr val="accent1"/>
+          </a:effectRef>
+          <a:fontRef idx="minor">
+            <a:schemeClr val="lt1"/>
+          </a:fontRef>
+        </p:style>
+        <p:txBody>
+          <a:bodyPr wrap="square" lIns="109728" tIns="54864" rIns="109728" bIns="54864" rtlCol="0" anchor="ctr"/>
+          <a:lstStyle/>
+          <a:p>
+            <a:pPr algn="ctr"/>
+            <a:r>
+              <a:rPr sz="1900" b="1">
+                <a:solidFill>
+                  <a:srgbClr val="FFFFFF"/>
+                </a:solidFill>
+                <a:latin typeface="Arial Black"/>
+              </a:rPr>
+              <a:t>SIGNAL ENGINE</a:t>
+            </a:r>
+          </a:p>
+          <a:p>
+            <a:pPr algn="ctr"/>
+            <a:r>
+              <a:rPr sz="1000" b="0">
+                <a:solidFill>
+                  <a:srgbClr val="F3D9D9"/>
+                </a:solidFill>
+                <a:latin typeface="Calibri"/>
+              </a:rPr>
+              <a:t>deterministic verdict — collect-vs-pay · lookalike domains · 10 scam-script families · coercion · bait-VPA · blocklist  |  ≥60 खतरा · ≥30 सावधान</a:t>
+            </a:r>
+          </a:p>
+        </p:txBody>
+      </p:sp>
+      <p:sp>
+        <p:nvSpPr>
+          <p:cNvPr id="14" name="Right Arrow 13"/>
+          <p:cNvSpPr/>
+          <p:nvPr/>
+        </p:nvSpPr>
+        <p:spPr>
+          <a:xfrm>
+            <a:off x="7909560" y="2999232"/>
+            <a:ext cx="411480" cy="457200"/>
+          </a:xfrm>
+          <a:prstGeom prst="rightArrow">
+            <a:avLst/>
+          </a:prstGeom>
+          <a:solidFill>
+            <a:srgbClr val="E8A13B"/>
+          </a:solidFill>
+          <a:ln>
+            <a:noFill/>
+          </a:ln>
+          <a:effectLst/>
+        </p:spPr>
+        <p:style>
+          <a:lnRef idx="1">
+            <a:schemeClr val="accent1"/>
+          </a:lnRef>
+          <a:fillRef idx="3">
+            <a:schemeClr val="accent1"/>
+          </a:fillRef>
+          <a:effectRef idx="2">
+            <a:schemeClr val="accent1"/>
+          </a:effectRef>
+          <a:fontRef idx="minor">
+            <a:schemeClr val="lt1"/>
+          </a:fontRef>
+        </p:style>
+        <p:txBody>
+          <a:bodyPr rtlCol="0" anchor="ctr"/>
+          <a:lstStyle/>
+          <a:p>
+            <a:pPr algn="ctr"/>
+            <a:endParaRPr/>
+          </a:p>
+        </p:txBody>
+      </p:sp>
+      <p:sp>
+        <p:nvSpPr>
+          <p:cNvPr id="15" name="Rounded Rectangle 14"/>
+          <p:cNvSpPr/>
+          <p:nvPr/>
+        </p:nvSpPr>
+        <p:spPr>
+          <a:xfrm>
+            <a:off x="8412480" y="2514600"/>
+            <a:ext cx="2926080" cy="1417320"/>
+          </a:xfrm>
+          <a:prstGeom prst="roundRect">
+            <a:avLst>
+              <a:gd name="adj" fmla="val 8000"/>
+            </a:avLst>
+          </a:prstGeom>
+          <a:solidFill>
+            <a:srgbClr val="FFFFFF"/>
+          </a:solidFill>
+          <a:ln w="28575">
+            <a:solidFill>
+              <a:srgbClr val="0E2841"/>
+            </a:solidFill>
+          </a:ln>
+          <a:effectLst/>
+        </p:spPr>
+        <p:style>
+          <a:lnRef idx="1">
+            <a:schemeClr val="accent1"/>
+          </a:lnRef>
+          <a:fillRef idx="3">
+            <a:schemeClr val="accent1"/>
+          </a:fillRef>
+          <a:effectRef idx="2">
+            <a:schemeClr val="accent1"/>
+          </a:effectRef>
+          <a:fontRef idx="minor">
+            <a:schemeClr val="lt1"/>
+          </a:fontRef>
+        </p:style>
+        <p:txBody>
+          <a:bodyPr wrap="square" lIns="109728" tIns="54864" rIns="109728" bIns="54864" rtlCol="0" anchor="ctr"/>
+          <a:lstStyle/>
+          <a:p>
+            <a:pPr algn="ctr"/>
+            <a:r>
+              <a:rPr sz="1600" b="1">
+                <a:solidFill>
+                  <a:srgbClr val="0E2841"/>
+                </a:solidFill>
+                <a:latin typeface="Arial Black"/>
+              </a:rPr>
+              <a:t>EXPLAIN &amp; SPEAK</a:t>
+            </a:r>
+          </a:p>
+          <a:p>
+            <a:pPr algn="ctr"/>
+            <a:r>
+              <a:rPr sz="1000" b="0">
+                <a:solidFill>
+                  <a:srgbClr val="515E6E"/>
+                </a:solidFill>
+                <a:latin typeface="Calibri"/>
+              </a:rPr>
+              <a:t>Claude narrates from signals — zero verdict weight · Bulbul speaks the warning</a:t>
+            </a:r>
+          </a:p>
+        </p:txBody>
+      </p:sp>
+      <p:sp>
+        <p:nvSpPr>
+          <p:cNvPr id="16" name="Rectangle 15"/>
+          <p:cNvSpPr/>
+          <p:nvPr/>
+        </p:nvSpPr>
+        <p:spPr>
+          <a:xfrm>
+            <a:off x="5733288" y="4069080"/>
+            <a:ext cx="54864" cy="457200"/>
+          </a:xfrm>
+          <a:prstGeom prst="rect">
+            <a:avLst/>
+          </a:prstGeom>
+          <a:solidFill>
+            <a:srgbClr val="0E2841"/>
+          </a:solidFill>
+          <a:ln>
+            <a:noFill/>
+          </a:ln>
+          <a:effectLst/>
+        </p:spPr>
+        <p:style>
+          <a:lnRef idx="1">
+            <a:schemeClr val="accent1"/>
+          </a:lnRef>
+          <a:fillRef idx="3">
+            <a:schemeClr val="accent1"/>
+          </a:fillRef>
+          <a:effectRef idx="2">
+            <a:schemeClr val="accent1"/>
+          </a:effectRef>
+          <a:fontRef idx="minor">
+            <a:schemeClr val="lt1"/>
+          </a:fontRef>
+        </p:style>
+        <p:txBody>
+          <a:bodyPr rtlCol="0" anchor="ctr"/>
+          <a:lstStyle/>
+          <a:p>
+            <a:pPr algn="ctr"/>
+            <a:endParaRPr/>
+          </a:p>
+        </p:txBody>
+      </p:sp>
+      <p:sp>
+        <p:nvSpPr>
+          <p:cNvPr id="17" name="Rounded Rectangle 16"/>
+          <p:cNvSpPr/>
+          <p:nvPr/>
+        </p:nvSpPr>
+        <p:spPr>
+          <a:xfrm>
+            <a:off x="4434840" y="4526280"/>
+            <a:ext cx="2651760" cy="731520"/>
+          </a:xfrm>
+          <a:prstGeom prst="roundRect">
+            <a:avLst>
+              <a:gd name="adj" fmla="val 8000"/>
+            </a:avLst>
+          </a:prstGeom>
+          <a:solidFill>
+            <a:srgbClr val="FFFFFF"/>
+          </a:solidFill>
+          <a:ln w="28575">
+            <a:solidFill>
+              <a:srgbClr val="156082"/>
+            </a:solidFill>
+          </a:ln>
+          <a:effectLst/>
+        </p:spPr>
+        <p:style>
+          <a:lnRef idx="1">
+            <a:schemeClr val="accent1"/>
+          </a:lnRef>
+          <a:fillRef idx="3">
+            <a:schemeClr val="accent1"/>
+          </a:fillRef>
+          <a:effectRef idx="2">
+            <a:schemeClr val="accent1"/>
+          </a:effectRef>
+          <a:fontRef idx="minor">
+            <a:schemeClr val="lt1"/>
+          </a:fontRef>
+        </p:style>
+        <p:txBody>
+          <a:bodyPr wrap="square" lIns="109728" tIns="54864" rIns="109728" bIns="54864" rtlCol="0" anchor="ctr"/>
+          <a:lstStyle/>
+          <a:p>
+            <a:pPr algn="ctr"/>
+            <a:r>
+              <a:rPr sz="1500" b="1">
+                <a:solidFill>
+                  <a:srgbClr val="156082"/>
+                </a:solidFill>
+                <a:latin typeface="Arial Black"/>
+              </a:rPr>
+              <a:t>MongoDB Atlas</a:t>
+            </a:r>
+          </a:p>
+          <a:p>
+            <a:pPr algn="ctr"/>
+            <a:r>
+              <a:rPr sz="950" b="0">
+                <a:solidFill>
+                  <a:srgbClr val="515E6E"/>
+                </a:solidFill>
+                <a:latin typeface="Calibri"/>
+              </a:rPr>
+              <a:t>durable community intel — human-verified blocklist</a:t>
+            </a:r>
+          </a:p>
+        </p:txBody>
+      </p:sp>
+      <p:sp>
+        <p:nvSpPr>
+          <p:cNvPr id="18" name="TextBox 17"/>
+          <p:cNvSpPr txBox="1"/>
+          <p:nvPr/>
+        </p:nvSpPr>
+        <p:spPr>
+          <a:xfrm>
+            <a:off x="822960" y="5486400"/>
+            <a:ext cx="10515600" cy="1005840"/>
+          </a:xfrm>
+          <a:prstGeom prst="rect">
+            <a:avLst/>
+          </a:prstGeom>
+          <a:noFill/>
+        </p:spPr>
+        <p:txBody>
+          <a:bodyPr wrap="square" lIns="0" tIns="0" rIns="0" bIns="0">
+            <a:spAutoFit/>
+          </a:bodyPr>
+          <a:lstStyle/>
           <a:p>
             <a:pPr>
+              <a:spcBef>
+                <a:spcPts val="1200"/>
+              </a:spcBef>
               <a:spcAft>
                 <a:spcPts val="300"/>
               </a:spcAft>
             </a:pPr>
             <a:r>
-              <a:rPr sz="1450">
+              <a:rPr sz="2000" b="1">
+                <a:solidFill>
+                  <a:srgbClr val="156082"/>
+                </a:solidFill>
+                <a:latin typeface="Arial Black"/>
+              </a:rPr>
+              <a:t>Reliability engineering</a:t>
+            </a:r>
+          </a:p>
+          <a:p>
+            <a:pPr>
+              <a:spcAft>
+                <a:spcPts val="400"/>
+              </a:spcAft>
+            </a:pPr>
+            <a:r>
+              <a:rPr sz="1500" b="0">
                 <a:solidFill>
                   <a:srgbClr val="0E2841"/>
                 </a:solidFill>
                 <a:latin typeface="Calibri"/>
               </a:rPr>
-              <a:t>Next.js PWA (Vercel) · FastAPI on Vercel Python · MongoDB Atlas (durable community intel) · Claude claude-sonnet-5 (narration only) · Sarvam AI — Saarika ASR + Bulbul TTS (voice in/out) · QR decoded on-device with jsQR.</a:t>
-            </a:r>
-          </a:p>
-          <a:p>
-            <a:pPr>
-              <a:spcBef>
-                <a:spcPts val="1000"/>
-              </a:spcBef>
-              <a:spcAft>
-                <a:spcPts val="200"/>
-              </a:spcAft>
-            </a:pPr>
-            <a:r>
-              <a:rPr sz="1700" b="1">
-                <a:solidFill>
-                  <a:srgbClr val="156082"/>
-                </a:solidFill>
-                <a:latin typeface="Calibri"/>
-              </a:rPr>
-              <a:t>Deterministic signal engine — the AI has zero verdict weight</a:t>
-            </a:r>
-          </a:p>
-          <a:p>
-            <a:pPr>
-              <a:spcAft>
-                <a:spcPts val="300"/>
-              </a:spcAft>
-            </a:pPr>
-            <a:r>
-              <a:rPr sz="1450">
-                <a:solidFill>
-                  <a:srgbClr val="0E2841"/>
-                </a:solidFill>
-                <a:latin typeface="Calibri"/>
-              </a:rPr>
-              <a:t>UPI collect-vs-pay parser · lookalike-domain detection (token + edit-distance vs official bank/PSP seed list) · 10 scam-script families incl. coercion/extortion, job &amp; loan-fee scams (Hindi + Hinglish + English) · bait-word VPA analysis · community blocklist (human-verified) · urgency/secrecy/fee-demand psychology signals. Score ≥60 → खतरा, ≥30 → सावधान.</a:t>
-            </a:r>
-          </a:p>
-          <a:p>
-            <a:pPr>
-              <a:spcBef>
-                <a:spcPts val="1000"/>
-              </a:spcBef>
-              <a:spcAft>
-                <a:spcPts val="200"/>
-              </a:spcAft>
-            </a:pPr>
-            <a:r>
-              <a:rPr sz="1700" b="1">
-                <a:solidFill>
-                  <a:srgbClr val="156082"/>
-                </a:solidFill>
-                <a:latin typeface="Calibri"/>
-              </a:rPr>
-              <a:t>Reliability engineering</a:t>
-            </a:r>
-          </a:p>
-          <a:p>
-            <a:pPr>
-              <a:spcAft>
-                <a:spcPts val="300"/>
-              </a:spcAft>
-            </a:pPr>
-            <a:r>
-              <a:rPr sz="1450">
-                <a:solidFill>
-                  <a:srgbClr val="0E2841"/>
-                </a:solidFill>
-                <a:latin typeface="Calibri"/>
-              </a:rPr>
-              <a:t>Every external call (Claude, Sarvam, Atlas) has retry-once + a deterministic fallback — dead venue Wi-Fi degrades prose, never protection. Anything mocked is labelled mocked:true on the wire.</a:t>
-            </a:r>
-          </a:p>
-          <a:p>
-            <a:pPr>
-              <a:spcAft>
-                <a:spcPts val="300"/>
-              </a:spcAft>
-            </a:pPr>
-            <a:r>
-              <a:rPr sz="1450">
-                <a:solidFill>
-                  <a:srgbClr val="0E2841"/>
-                </a:solidFill>
-                <a:latin typeface="Calibri"/>
-              </a:rPr>
-              <a:t>49 automated checks green (26 engine regression incl. adversarial sweep + 23 API contract) · measured live: verdict in ms, p50 5.4s with AI explanation, Hindi ASR 0.6s/clip.</a:t>
+              <a:t>Retry-once + deterministic fallback on every external call (dead Wi-Fi degrades prose, never protection; mocked responses say mocked:true) · 49 automated checks green · measured live: verdict in ms, p50 5.4s with explanation, Hindi ASR 0.6s.</a:t>
             </a:r>
           </a:p>
         </p:txBody>
@@ -4802,8 +5435,8 @@
         </p:nvSpPr>
         <p:spPr>
           <a:xfrm>
-            <a:off x="822960" y="1874519"/>
-            <a:ext cx="10515600" cy="4663440"/>
+            <a:off x="822960" y="1828800"/>
+            <a:ext cx="10515600" cy="4023360"/>
           </a:xfrm>
           <a:prstGeom prst="rect">
             <a:avLst/>
@@ -4811,113 +5444,147 @@
           <a:noFill/>
         </p:spPr>
         <p:txBody>
-          <a:bodyPr wrap="square">
+          <a:bodyPr wrap="square" lIns="0" tIns="0" rIns="0" bIns="0">
             <a:spAutoFit/>
           </a:bodyPr>
           <a:lstStyle/>
           <a:p>
             <a:pPr>
               <a:spcBef>
-                <a:spcPts val="1000"/>
+                <a:spcPts val="1200"/>
               </a:spcBef>
-              <a:spcAft>
-                <a:spcPts val="200"/>
-              </a:spcAft>
-            </a:pPr>
-            <a:r>
-              <a:rPr sz="1700" b="1">
-                <a:solidFill>
-                  <a:srgbClr val="156082"/>
-                </a:solidFill>
-                <a:latin typeface="Calibri"/>
-              </a:rPr>
-              <a:t>Designed like a public-safety poster, not a SaaS dashboard</a:t>
-            </a:r>
-          </a:p>
-          <a:p>
-            <a:pPr>
               <a:spcAft>
                 <a:spcPts val="300"/>
               </a:spcAft>
             </a:pPr>
             <a:r>
-              <a:rPr sz="1450">
+              <a:rPr sz="2000" b="1">
+                <a:solidFill>
+                  <a:srgbClr val="156082"/>
+                </a:solidFill>
+                <a:latin typeface="Arial Black"/>
+              </a:rPr>
+              <a:t>A public-safety poster, not a SaaS dashboard</a:t>
+            </a:r>
+          </a:p>
+          <a:p>
+            <a:pPr>
+              <a:spcAft>
+                <a:spcPts val="400"/>
+              </a:spcAft>
+            </a:pPr>
+            <a:r>
+              <a:rPr sz="1500" b="0">
                 <a:solidFill>
                   <a:srgbClr val="0E2841"/>
                 </a:solidFill>
                 <a:latin typeface="Calibri"/>
               </a:rPr>
-              <a:t>Hand-crafted "suraksha poster" identity: ink + saffron hazard language, Anek Devanagari display type, rubber-stamp community count on the verdict card. Danger screams; safety whispers.</a:t>
+              <a:t>Hand-built "suraksha poster" identity — ink + saffron hazard language, Anek Devanagari display type, a rubber-stamp community count on the verdict card.</a:t>
             </a:r>
           </a:p>
           <a:p>
             <a:pPr>
               <a:spcBef>
-                <a:spcPts val="1000"/>
+                <a:spcPts val="1200"/>
               </a:spcBef>
-              <a:spcAft>
-                <a:spcPts val="200"/>
-              </a:spcAft>
-            </a:pPr>
-            <a:r>
-              <a:rPr sz="1700" b="1">
-                <a:solidFill>
-                  <a:srgbClr val="156082"/>
-                </a:solidFill>
-                <a:latin typeface="Calibri"/>
-              </a:rPr>
-              <a:t>Built for the next billion users</a:t>
-            </a:r>
-          </a:p>
-          <a:p>
-            <a:pPr>
               <a:spcAft>
                 <a:spcPts val="300"/>
               </a:spcAft>
             </a:pPr>
             <a:r>
-              <a:rPr sz="1450">
+              <a:rPr sz="2000" b="1">
+                <a:solidFill>
+                  <a:srgbClr val="156082"/>
+                </a:solidFill>
+                <a:latin typeface="Arial Black"/>
+              </a:rPr>
+              <a:t>Built for the next billion users</a:t>
+            </a:r>
+          </a:p>
+          <a:p>
+            <a:pPr>
+              <a:spcAft>
+                <a:spcPts val="400"/>
+              </a:spcAft>
+            </a:pPr>
+            <a:r>
+              <a:rPr sz="1500" b="0">
                 <a:solidFill>
                   <a:srgbClr val="0E2841"/>
                 </a:solidFill>
                 <a:latin typeface="Calibri"/>
               </a:rPr>
-              <a:t>Hindi-first with a global हिं/EN toggle (persists across every page and every output, including the spoken warning) · voice in AND voice out for low-literacy users · QR photos decoded on-device — the image never leaves the phone · works on entry-level phones over weak networks.</a:t>
+              <a:t>Hindi-first with a global हिं/EN toggle that holds across every page and every output — including the spoken warning · voice in AND out for low-literacy users · QR photos decoded on-device (the image never leaves the phone) · entry-level phones, weak networks.</a:t>
             </a:r>
           </a:p>
           <a:p>
             <a:pPr>
               <a:spcBef>
-                <a:spcPts val="1000"/>
+                <a:spcPts val="1200"/>
               </a:spcBef>
-              <a:spcAft>
-                <a:spcPts val="200"/>
-              </a:spcAft>
-            </a:pPr>
-            <a:r>
-              <a:rPr sz="1700" b="1">
-                <a:solidFill>
-                  <a:srgbClr val="156082"/>
-                </a:solidFill>
-                <a:latin typeface="Calibri"/>
-              </a:rPr>
-              <a:t>Dignity by design</a:t>
-            </a:r>
-          </a:p>
-          <a:p>
-            <a:pPr>
               <a:spcAft>
                 <a:spcPts val="300"/>
               </a:spcAft>
             </a:pPr>
             <a:r>
-              <a:rPr sz="1450">
+              <a:rPr sz="2000" b="1">
+                <a:solidFill>
+                  <a:srgbClr val="156082"/>
+                </a:solidFill>
+                <a:latin typeface="Arial Black"/>
+              </a:rPr>
+              <a:t>Dignity by design</a:t>
+            </a:r>
+          </a:p>
+          <a:p>
+            <a:pPr>
+              <a:spcAft>
+                <a:spcPts val="400"/>
+              </a:spcAft>
+            </a:pPr>
+            <a:r>
+              <a:rPr sz="1500" b="0">
                 <a:solidFill>
                   <a:srgbClr val="0E2841"/>
                 </a:solidFill>
                 <a:latin typeface="Calibri"/>
               </a:rPr>
-              <a:t>Guardian mode shares only the risk summary with a chosen family member — never transactions. Every ward check appears on the guardian's page (risky = decision, clean = quiet note). Honest language everywhere: "no KNOWN risk", never "safe".</a:t>
+              <a:t>Guardian mode shares the risk summary only — never transactions. Risky checks ask for a decision; clean ones appear as quiet notes. Honest language everywhere.</a:t>
+            </a:r>
+          </a:p>
+        </p:txBody>
+      </p:sp>
+      <p:sp>
+        <p:nvSpPr>
+          <p:cNvPr id="11" name="TextBox 10"/>
+          <p:cNvSpPr txBox="1"/>
+          <p:nvPr/>
+        </p:nvSpPr>
+        <p:spPr>
+          <a:xfrm>
+            <a:off x="822960" y="5943600"/>
+            <a:ext cx="10515600" cy="548640"/>
+          </a:xfrm>
+          <a:prstGeom prst="rect">
+            <a:avLst/>
+          </a:prstGeom>
+          <a:noFill/>
+        </p:spPr>
+        <p:txBody>
+          <a:bodyPr wrap="square" lIns="0" tIns="0" rIns="0" bIns="0">
+            <a:spAutoFit/>
+          </a:bodyPr>
+          <a:lstStyle/>
+          <a:p>
+            <a:r>
+              <a:rPr sz="2700" b="1">
+                <a:solidFill>
+                  <a:srgbClr val="C62828"/>
+                </a:solidFill>
+                <a:latin typeface="Arial Black"/>
+              </a:rPr>
+              <a:t>Danger screams. Safety whispers.</a:t>
             </a:r>
           </a:p>
         </p:txBody>
@@ -5255,8 +5922,8 @@
         </p:nvSpPr>
         <p:spPr>
           <a:xfrm>
-            <a:off x="822960" y="1874519"/>
-            <a:ext cx="10515600" cy="4663440"/>
+            <a:off x="822960" y="1783080"/>
+            <a:ext cx="10515600" cy="502920"/>
           </a:xfrm>
           <a:prstGeom prst="rect">
             <a:avLst/>
@@ -5264,110 +5931,388 @@
           <a:noFill/>
         </p:spPr>
         <p:txBody>
-          <a:bodyPr wrap="square">
+          <a:bodyPr wrap="square" lIns="0" tIns="0" rIns="0" bIns="0">
             <a:spAutoFit/>
           </a:bodyPr>
           <a:lstStyle/>
           <a:p>
-            <a:pPr>
-              <a:spcAft>
-                <a:spcPts val="600"/>
-              </a:spcAft>
-            </a:pPr>
-            <a:r>
-              <a:rPr sz="2000" b="1">
+            <a:r>
+              <a:rPr sz="2600" b="1">
                 <a:solidFill>
                   <a:srgbClr val="0E2841"/>
                 </a:solidFill>
-                <a:latin typeface="Calibri"/>
+                <a:latin typeface="Arial Black"/>
               </a:rPr>
               <a:t>Not a concept — deployed, tested and durable tonight.</a:t>
             </a:r>
           </a:p>
+        </p:txBody>
+      </p:sp>
+      <p:sp>
+        <p:nvSpPr>
+          <p:cNvPr id="12" name="Rounded Rectangle 11"/>
+          <p:cNvSpPr/>
+          <p:nvPr/>
+        </p:nvSpPr>
+        <p:spPr>
+          <a:xfrm>
+            <a:off x="822960" y="2468880"/>
+            <a:ext cx="2487168" cy="1371600"/>
+          </a:xfrm>
+          <a:prstGeom prst="roundRect">
+            <a:avLst>
+              <a:gd name="adj" fmla="val 6000"/>
+            </a:avLst>
+          </a:prstGeom>
+          <a:solidFill>
+            <a:srgbClr val="FFFFFF"/>
+          </a:solidFill>
+          <a:ln w="28575">
+            <a:solidFill>
+              <a:srgbClr val="0E2841"/>
+            </a:solidFill>
+          </a:ln>
+          <a:effectLst/>
+        </p:spPr>
+        <p:style>
+          <a:lnRef idx="1">
+            <a:schemeClr val="accent1"/>
+          </a:lnRef>
+          <a:fillRef idx="3">
+            <a:schemeClr val="accent1"/>
+          </a:fillRef>
+          <a:effectRef idx="2">
+            <a:schemeClr val="accent1"/>
+          </a:effectRef>
+          <a:fontRef idx="minor">
+            <a:schemeClr val="lt1"/>
+          </a:fontRef>
+        </p:style>
+        <p:txBody>
+          <a:bodyPr wrap="square" lIns="73152" tIns="73152" rIns="73152" bIns="54864" rtlCol="0" anchor="ctr"/>
+          <a:lstStyle/>
+          <a:p>
+            <a:pPr algn="ctr"/>
+            <a:r>
+              <a:rPr sz="4600" b="1">
+                <a:solidFill>
+                  <a:srgbClr val="0E2841"/>
+                </a:solidFill>
+                <a:latin typeface="Arial Black"/>
+              </a:rPr>
+              <a:t>49</a:t>
+            </a:r>
+          </a:p>
+          <a:p>
+            <a:pPr algn="ctr"/>
+            <a:r>
+              <a:rPr sz="1250" b="1">
+                <a:solidFill>
+                  <a:srgbClr val="515E6E"/>
+                </a:solidFill>
+                <a:latin typeface="Arial Black"/>
+              </a:rPr>
+              <a:t>AUTOMATED CHECKS GREEN</a:t>
+            </a:r>
+          </a:p>
+        </p:txBody>
+      </p:sp>
+      <p:sp>
+        <p:nvSpPr>
+          <p:cNvPr id="13" name="Rounded Rectangle 12"/>
+          <p:cNvSpPr/>
+          <p:nvPr/>
+        </p:nvSpPr>
+        <p:spPr>
+          <a:xfrm>
+            <a:off x="3502152" y="2468880"/>
+            <a:ext cx="2487168" cy="1371600"/>
+          </a:xfrm>
+          <a:prstGeom prst="roundRect">
+            <a:avLst>
+              <a:gd name="adj" fmla="val 6000"/>
+            </a:avLst>
+          </a:prstGeom>
+          <a:solidFill>
+            <a:srgbClr val="FFFFFF"/>
+          </a:solidFill>
+          <a:ln w="28575">
+            <a:solidFill>
+              <a:srgbClr val="0E2841"/>
+            </a:solidFill>
+          </a:ln>
+          <a:effectLst/>
+        </p:spPr>
+        <p:style>
+          <a:lnRef idx="1">
+            <a:schemeClr val="accent1"/>
+          </a:lnRef>
+          <a:fillRef idx="3">
+            <a:schemeClr val="accent1"/>
+          </a:fillRef>
+          <a:effectRef idx="2">
+            <a:schemeClr val="accent1"/>
+          </a:effectRef>
+          <a:fontRef idx="minor">
+            <a:schemeClr val="lt1"/>
+          </a:fontRef>
+        </p:style>
+        <p:txBody>
+          <a:bodyPr wrap="square" lIns="73152" tIns="73152" rIns="73152" bIns="54864" rtlCol="0" anchor="ctr"/>
+          <a:lstStyle/>
+          <a:p>
+            <a:pPr algn="ctr"/>
+            <a:r>
+              <a:rPr sz="4600" b="1">
+                <a:solidFill>
+                  <a:srgbClr val="156082"/>
+                </a:solidFill>
+                <a:latin typeface="Arial Black"/>
+              </a:rPr>
+              <a:t>5.4s</a:t>
+            </a:r>
+          </a:p>
+          <a:p>
+            <a:pPr algn="ctr"/>
+            <a:r>
+              <a:rPr sz="1250" b="1">
+                <a:solidFill>
+                  <a:srgbClr val="515E6E"/>
+                </a:solidFill>
+                <a:latin typeface="Arial Black"/>
+              </a:rPr>
+              <a:t>P50 CHECK, LIVE PROD</a:t>
+            </a:r>
+          </a:p>
+        </p:txBody>
+      </p:sp>
+      <p:sp>
+        <p:nvSpPr>
+          <p:cNvPr id="14" name="Rounded Rectangle 13"/>
+          <p:cNvSpPr/>
+          <p:nvPr/>
+        </p:nvSpPr>
+        <p:spPr>
+          <a:xfrm>
+            <a:off x="6181344" y="2468880"/>
+            <a:ext cx="2487168" cy="1371600"/>
+          </a:xfrm>
+          <a:prstGeom prst="roundRect">
+            <a:avLst>
+              <a:gd name="adj" fmla="val 6000"/>
+            </a:avLst>
+          </a:prstGeom>
+          <a:solidFill>
+            <a:srgbClr val="FFFFFF"/>
+          </a:solidFill>
+          <a:ln w="28575">
+            <a:solidFill>
+              <a:srgbClr val="0E2841"/>
+            </a:solidFill>
+          </a:ln>
+          <a:effectLst/>
+        </p:spPr>
+        <p:style>
+          <a:lnRef idx="1">
+            <a:schemeClr val="accent1"/>
+          </a:lnRef>
+          <a:fillRef idx="3">
+            <a:schemeClr val="accent1"/>
+          </a:fillRef>
+          <a:effectRef idx="2">
+            <a:schemeClr val="accent1"/>
+          </a:effectRef>
+          <a:fontRef idx="minor">
+            <a:schemeClr val="lt1"/>
+          </a:fontRef>
+        </p:style>
+        <p:txBody>
+          <a:bodyPr wrap="square" lIns="73152" tIns="73152" rIns="73152" bIns="54864" rtlCol="0" anchor="ctr"/>
+          <a:lstStyle/>
+          <a:p>
+            <a:pPr algn="ctr"/>
+            <a:r>
+              <a:rPr sz="4600" b="1">
+                <a:solidFill>
+                  <a:srgbClr val="156082"/>
+                </a:solidFill>
+                <a:latin typeface="Arial Black"/>
+              </a:rPr>
+              <a:t>450+</a:t>
+            </a:r>
+          </a:p>
+          <a:p>
+            <a:pPr algn="ctr"/>
+            <a:r>
+              <a:rPr sz="1250" b="1">
+                <a:solidFill>
+                  <a:srgbClr val="515E6E"/>
+                </a:solidFill>
+                <a:latin typeface="Arial Black"/>
+              </a:rPr>
+              <a:t>VERIFIED REPORTS IN ATLAS</a:t>
+            </a:r>
+          </a:p>
+        </p:txBody>
+      </p:sp>
+      <p:sp>
+        <p:nvSpPr>
+          <p:cNvPr id="15" name="Rounded Rectangle 14"/>
+          <p:cNvSpPr/>
+          <p:nvPr/>
+        </p:nvSpPr>
+        <p:spPr>
+          <a:xfrm>
+            <a:off x="8860536" y="2468880"/>
+            <a:ext cx="2487168" cy="1371600"/>
+          </a:xfrm>
+          <a:prstGeom prst="roundRect">
+            <a:avLst>
+              <a:gd name="adj" fmla="val 6000"/>
+            </a:avLst>
+          </a:prstGeom>
+          <a:solidFill>
+            <a:srgbClr val="FFFFFF"/>
+          </a:solidFill>
+          <a:ln w="28575">
+            <a:solidFill>
+              <a:srgbClr val="0E2841"/>
+            </a:solidFill>
+          </a:ln>
+          <a:effectLst/>
+        </p:spPr>
+        <p:style>
+          <a:lnRef idx="1">
+            <a:schemeClr val="accent1"/>
+          </a:lnRef>
+          <a:fillRef idx="3">
+            <a:schemeClr val="accent1"/>
+          </a:fillRef>
+          <a:effectRef idx="2">
+            <a:schemeClr val="accent1"/>
+          </a:effectRef>
+          <a:fontRef idx="minor">
+            <a:schemeClr val="lt1"/>
+          </a:fontRef>
+        </p:style>
+        <p:txBody>
+          <a:bodyPr wrap="square" lIns="73152" tIns="73152" rIns="73152" bIns="54864" rtlCol="0" anchor="ctr"/>
+          <a:lstStyle/>
+          <a:p>
+            <a:pPr algn="ctr"/>
+            <a:r>
+              <a:rPr sz="4600" b="1">
+                <a:solidFill>
+                  <a:srgbClr val="C62828"/>
+                </a:solidFill>
+                <a:latin typeface="Arial Black"/>
+              </a:rPr>
+              <a:t>₹0</a:t>
+            </a:r>
+          </a:p>
+          <a:p>
+            <a:pPr algn="ctr"/>
+            <a:r>
+              <a:rPr sz="1250" b="1">
+                <a:solidFill>
+                  <a:srgbClr val="515E6E"/>
+                </a:solidFill>
+                <a:latin typeface="Arial Black"/>
+              </a:rPr>
+              <a:t>INFRA — FREE TIERS</a:t>
+            </a:r>
+          </a:p>
+        </p:txBody>
+      </p:sp>
+      <p:sp>
+        <p:nvSpPr>
+          <p:cNvPr id="16" name="TextBox 15"/>
+          <p:cNvSpPr txBox="1"/>
+          <p:nvPr/>
+        </p:nvSpPr>
+        <p:spPr>
+          <a:xfrm>
+            <a:off x="822960" y="4160520"/>
+            <a:ext cx="10515600" cy="2286000"/>
+          </a:xfrm>
+          <a:prstGeom prst="rect">
+            <a:avLst/>
+          </a:prstGeom>
+          <a:noFill/>
+        </p:spPr>
+        <p:txBody>
+          <a:bodyPr wrap="square" lIns="0" tIns="0" rIns="0" bIns="0">
+            <a:spAutoFit/>
+          </a:bodyPr>
+          <a:lstStyle/>
           <a:p>
             <a:pPr>
+              <a:spcBef>
+                <a:spcPts val="1200"/>
+              </a:spcBef>
               <a:spcAft>
                 <a:spcPts val="300"/>
               </a:spcAft>
             </a:pPr>
             <a:r>
-              <a:rPr sz="1450">
+              <a:rPr sz="2000" b="1">
+                <a:solidFill>
+                  <a:srgbClr val="156082"/>
+                </a:solidFill>
+                <a:latin typeface="Arial Black"/>
+              </a:rPr>
+              <a:t>Live now</a:t>
+            </a:r>
+          </a:p>
+          <a:p>
+            <a:pPr>
+              <a:spcAft>
+                <a:spcPts val="400"/>
+              </a:spcAft>
+            </a:pPr>
+            <a:r>
+              <a:rPr sz="1500" b="0">
                 <a:solidFill>
                   <a:srgbClr val="0E2841"/>
                 </a:solidFill>
                 <a:latin typeface="Calibri"/>
               </a:rPr>
-              <a:t>Live: dhaal-delta.vercel.app (app) + dhaal-api.vercel.app (API) · MongoDB Atlas holds 450+ verified community reports · guardian pairing, flywheel and the voice loop all work end-to-end on stage hardware.</a:t>
+              <a:t>dhaal-delta.vercel.app (app) · dhaal-api.vercel.app (API) · guardian pairing, community flywheel and the full voice loop verified end-to-end on stage hardware.</a:t>
             </a:r>
           </a:p>
           <a:p>
             <a:pPr>
               <a:spcBef>
-                <a:spcPts val="1000"/>
+                <a:spcPts val="1200"/>
               </a:spcBef>
-              <a:spcAft>
-                <a:spcPts val="200"/>
-              </a:spcAft>
-            </a:pPr>
-            <a:r>
-              <a:rPr sz="1700" b="1">
-                <a:solidFill>
-                  <a:srgbClr val="156082"/>
-                </a:solidFill>
-                <a:latin typeface="Calibri"/>
-              </a:rPr>
-              <a:t>Engineering feasibility</a:t>
-            </a:r>
-          </a:p>
-          <a:p>
-            <a:pPr>
               <a:spcAft>
                 <a:spcPts val="300"/>
               </a:spcAft>
             </a:pPr>
             <a:r>
-              <a:rPr sz="1450">
+              <a:rPr sz="2000" b="1">
+                <a:solidFill>
+                  <a:srgbClr val="156082"/>
+                </a:solidFill>
+                <a:latin typeface="Arial Black"/>
+              </a:rPr>
+              <a:t>Risks &amp; mitigations</a:t>
+            </a:r>
+          </a:p>
+          <a:p>
+            <a:pPr>
+              <a:spcAft>
+                <a:spcPts val="400"/>
+              </a:spcAft>
+            </a:pPr>
+            <a:r>
+              <a:rPr sz="1500" b="0">
                 <a:solidFill>
                   <a:srgbClr val="0E2841"/>
                 </a:solidFill>
                 <a:latin typeface="Calibri"/>
               </a:rPr>
-              <a:t>Entire stack runs on free tiers (Vercel + Atlas M0) — marginal cost per check is a fraction of a paisa (one short Claude narration; the verdict itself is free rule computation). 49 automated checks; an adversarial sweep of unseen scams was fixed pre-demo and folded into regression.</a:t>
-            </a:r>
-          </a:p>
-          <a:p>
-            <a:pPr>
-              <a:spcBef>
-                <a:spcPts val="1000"/>
-              </a:spcBef>
-              <a:spcAft>
-                <a:spcPts val="200"/>
-              </a:spcAft>
-            </a:pPr>
-            <a:r>
-              <a:rPr sz="1700" b="1">
-                <a:solidFill>
-                  <a:srgbClr val="156082"/>
-                </a:solidFill>
-                <a:latin typeface="Calibri"/>
-              </a:rPr>
-              <a:t>Risks &amp; mitigations</a:t>
-            </a:r>
-          </a:p>
-          <a:p>
-            <a:pPr>
-              <a:spcAft>
-                <a:spcPts val="300"/>
-              </a:spcAft>
-            </a:pPr>
-            <a:r>
-              <a:rPr sz="1450">
-                <a:solidFill>
-                  <a:srgbClr val="0E2841"/>
-                </a:solidFill>
-                <a:latin typeface="Calibri"/>
-              </a:rPr>
-              <a:t>API outage → deterministic fallbacks (the demo survives) · false positives → delivery-vs-request context rules, tested on real bank OTP/debit SMS (score 0) · blocklist poisoning → human moderator verification before any indicator goes live · scale → stateless serverless + Atlas; TTS caching.</a:t>
+              <a:t>API outage → deterministic fallbacks, demo survives · false positives → delivery-vs-request context rules, tested on real bank OTP/debit SMS (score 0) · blocklist poisoning → human verification before any indicator goes live · scale → stateless serverless + Atlas, TTS caching.</a:t>
             </a:r>
           </a:p>
         </p:txBody>
@@ -5705,8 +6650,8 @@
         </p:nvSpPr>
         <p:spPr>
           <a:xfrm>
-            <a:off x="822960" y="1874519"/>
-            <a:ext cx="10515600" cy="4663440"/>
+            <a:off x="822960" y="1783080"/>
+            <a:ext cx="10515600" cy="822960"/>
           </a:xfrm>
           <a:prstGeom prst="rect">
             <a:avLst/>
@@ -5714,110 +6659,570 @@
           <a:noFill/>
         </p:spPr>
         <p:txBody>
-          <a:bodyPr wrap="square">
+          <a:bodyPr wrap="square" lIns="0" tIns="0" rIns="0" bIns="0">
             <a:spAutoFit/>
           </a:bodyPr>
           <a:lstStyle/>
           <a:p>
+            <a:r>
+              <a:rPr sz="4000" b="1">
+                <a:solidFill>
+                  <a:srgbClr val="C62828"/>
+                </a:solidFill>
+                <a:latin typeface="Arial Black"/>
+              </a:rPr>
+              <a:t>₹22,495 crore</a:t>
+            </a:r>
+            <a:r>
+              <a:rPr sz="2100" b="1">
+                <a:solidFill>
+                  <a:srgbClr val="0E2841"/>
+                </a:solidFill>
+                <a:latin typeface="Arial Black"/>
+              </a:rPr>
+              <a:t>  lost to cyber fraud in 2025 — and the victim pressed PAY themselves.</a:t>
+            </a:r>
+          </a:p>
+        </p:txBody>
+      </p:sp>
+      <p:sp>
+        <p:nvSpPr>
+          <p:cNvPr id="11" name="TextBox 10"/>
+          <p:cNvSpPr txBox="1"/>
+          <p:nvPr/>
+        </p:nvSpPr>
+        <p:spPr>
+          <a:xfrm>
+            <a:off x="822960" y="2606040"/>
+            <a:ext cx="10515600" cy="548640"/>
+          </a:xfrm>
+          <a:prstGeom prst="rect">
+            <a:avLst/>
+          </a:prstGeom>
+          <a:noFill/>
+        </p:spPr>
+        <p:txBody>
+          <a:bodyPr wrap="square" lIns="0" tIns="0" rIns="0" bIns="0">
+            <a:spAutoFit/>
+          </a:bodyPr>
+          <a:lstStyle/>
+          <a:p>
             <a:pPr>
               <a:spcAft>
-                <a:spcPts val="600"/>
+                <a:spcPts val="400"/>
               </a:spcAft>
             </a:pPr>
             <a:r>
-              <a:rPr sz="2000" b="1">
+              <a:rPr sz="1500" b="0">
                 <a:solidFill>
                   <a:srgbClr val="0E2841"/>
                 </a:solidFill>
                 <a:latin typeface="Calibri"/>
               </a:rPr>
-              <a:t>₹22,495 crore lost to cyber fraud in 2025 — and the victim pressed PAY themselves.</a:t>
-            </a:r>
-          </a:p>
+              <a:t>24.51B UPI txns/month (NPCI Aug '26) · 28.1 lakh complaints in 2025 (I4C) · ₹805 crore UPI fraud in FY26 (Parliament) — bank controls cannot stop payments the victim authorises.</a:t>
+            </a:r>
+          </a:p>
+        </p:txBody>
+      </p:sp>
+      <p:sp>
+        <p:nvSpPr>
+          <p:cNvPr id="12" name="Rounded Rectangle 11"/>
+          <p:cNvSpPr/>
+          <p:nvPr/>
+        </p:nvSpPr>
+        <p:spPr>
+          <a:xfrm>
+            <a:off x="822960" y="3520440"/>
+            <a:ext cx="2331720" cy="960120"/>
+          </a:xfrm>
+          <a:prstGeom prst="roundRect">
+            <a:avLst>
+              <a:gd name="adj" fmla="val 8000"/>
+            </a:avLst>
+          </a:prstGeom>
+          <a:solidFill>
+            <a:srgbClr val="FFFFFF"/>
+          </a:solidFill>
+          <a:ln w="28575">
+            <a:solidFill>
+              <a:srgbClr val="0E2841"/>
+            </a:solidFill>
+          </a:ln>
+          <a:effectLst/>
+        </p:spPr>
+        <p:style>
+          <a:lnRef idx="1">
+            <a:schemeClr val="accent1"/>
+          </a:lnRef>
+          <a:fillRef idx="3">
+            <a:schemeClr val="accent1"/>
+          </a:fillRef>
+          <a:effectRef idx="2">
+            <a:schemeClr val="accent1"/>
+          </a:effectRef>
+          <a:fontRef idx="minor">
+            <a:schemeClr val="lt1"/>
+          </a:fontRef>
+        </p:style>
+        <p:txBody>
+          <a:bodyPr wrap="square" lIns="109728" tIns="54864" rIns="109728" bIns="54864" rtlCol="0" anchor="ctr"/>
+          <a:lstStyle/>
+          <a:p>
+            <a:pPr algn="ctr"/>
+            <a:r>
+              <a:rPr sz="1550" b="1">
+                <a:solidFill>
+                  <a:srgbClr val="0E2841"/>
+                </a:solidFill>
+                <a:latin typeface="Arial Black"/>
+              </a:rPr>
+              <a:t>1 REPORT</a:t>
+            </a:r>
+          </a:p>
+          <a:p>
+            <a:pPr algn="ctr"/>
+            <a:r>
+              <a:rPr sz="950" b="0">
+                <a:solidFill>
+                  <a:srgbClr val="515E6E"/>
+                </a:solidFill>
+                <a:latin typeface="Calibri"/>
+              </a:rPr>
+              <a:t>10 seconds</a:t>
+            </a:r>
+          </a:p>
+        </p:txBody>
+      </p:sp>
+      <p:sp>
+        <p:nvSpPr>
+          <p:cNvPr id="13" name="Right Arrow 12"/>
+          <p:cNvSpPr/>
+          <p:nvPr/>
+        </p:nvSpPr>
+        <p:spPr>
+          <a:xfrm>
+            <a:off x="3200400" y="3822191"/>
+            <a:ext cx="347472" cy="384048"/>
+          </a:xfrm>
+          <a:prstGeom prst="rightArrow">
+            <a:avLst/>
+          </a:prstGeom>
+          <a:solidFill>
+            <a:srgbClr val="E8A13B"/>
+          </a:solidFill>
+          <a:ln>
+            <a:noFill/>
+          </a:ln>
+          <a:effectLst/>
+        </p:spPr>
+        <p:style>
+          <a:lnRef idx="1">
+            <a:schemeClr val="accent1"/>
+          </a:lnRef>
+          <a:fillRef idx="3">
+            <a:schemeClr val="accent1"/>
+          </a:fillRef>
+          <a:effectRef idx="2">
+            <a:schemeClr val="accent1"/>
+          </a:effectRef>
+          <a:fontRef idx="minor">
+            <a:schemeClr val="lt1"/>
+          </a:fontRef>
+        </p:style>
+        <p:txBody>
+          <a:bodyPr rtlCol="0" anchor="ctr"/>
+          <a:lstStyle/>
+          <a:p>
+            <a:pPr algn="ctr"/>
+            <a:endParaRPr/>
+          </a:p>
+        </p:txBody>
+      </p:sp>
+      <p:sp>
+        <p:nvSpPr>
+          <p:cNvPr id="14" name="Rounded Rectangle 13"/>
+          <p:cNvSpPr/>
+          <p:nvPr/>
+        </p:nvSpPr>
+        <p:spPr>
+          <a:xfrm>
+            <a:off x="3566160" y="3520440"/>
+            <a:ext cx="2331720" cy="960120"/>
+          </a:xfrm>
+          <a:prstGeom prst="roundRect">
+            <a:avLst>
+              <a:gd name="adj" fmla="val 8000"/>
+            </a:avLst>
+          </a:prstGeom>
+          <a:solidFill>
+            <a:srgbClr val="FFFFFF"/>
+          </a:solidFill>
+          <a:ln w="28575">
+            <a:solidFill>
+              <a:srgbClr val="0E2841"/>
+            </a:solidFill>
+          </a:ln>
+          <a:effectLst/>
+        </p:spPr>
+        <p:style>
+          <a:lnRef idx="1">
+            <a:schemeClr val="accent1"/>
+          </a:lnRef>
+          <a:fillRef idx="3">
+            <a:schemeClr val="accent1"/>
+          </a:fillRef>
+          <a:effectRef idx="2">
+            <a:schemeClr val="accent1"/>
+          </a:effectRef>
+          <a:fontRef idx="minor">
+            <a:schemeClr val="lt1"/>
+          </a:fontRef>
+        </p:style>
+        <p:txBody>
+          <a:bodyPr wrap="square" lIns="109728" tIns="54864" rIns="109728" bIns="54864" rtlCol="0" anchor="ctr"/>
+          <a:lstStyle/>
+          <a:p>
+            <a:pPr algn="ctr"/>
+            <a:r>
+              <a:rPr sz="1550" b="1">
+                <a:solidFill>
+                  <a:srgbClr val="0E2841"/>
+                </a:solidFill>
+                <a:latin typeface="Arial Black"/>
+              </a:rPr>
+              <a:t>HUMAN VERIFY</a:t>
+            </a:r>
+          </a:p>
+          <a:p>
+            <a:pPr algn="ctr"/>
+            <a:r>
+              <a:rPr sz="950" b="0">
+                <a:solidFill>
+                  <a:srgbClr val="515E6E"/>
+                </a:solidFill>
+                <a:latin typeface="Calibri"/>
+              </a:rPr>
+              <a:t>no rumour poisoning</a:t>
+            </a:r>
+          </a:p>
+        </p:txBody>
+      </p:sp>
+      <p:sp>
+        <p:nvSpPr>
+          <p:cNvPr id="15" name="Right Arrow 14"/>
+          <p:cNvSpPr/>
+          <p:nvPr/>
+        </p:nvSpPr>
+        <p:spPr>
+          <a:xfrm>
+            <a:off x="5943600" y="3822191"/>
+            <a:ext cx="347472" cy="384048"/>
+          </a:xfrm>
+          <a:prstGeom prst="rightArrow">
+            <a:avLst/>
+          </a:prstGeom>
+          <a:solidFill>
+            <a:srgbClr val="E8A13B"/>
+          </a:solidFill>
+          <a:ln>
+            <a:noFill/>
+          </a:ln>
+          <a:effectLst/>
+        </p:spPr>
+        <p:style>
+          <a:lnRef idx="1">
+            <a:schemeClr val="accent1"/>
+          </a:lnRef>
+          <a:fillRef idx="3">
+            <a:schemeClr val="accent1"/>
+          </a:fillRef>
+          <a:effectRef idx="2">
+            <a:schemeClr val="accent1"/>
+          </a:effectRef>
+          <a:fontRef idx="minor">
+            <a:schemeClr val="lt1"/>
+          </a:fontRef>
+        </p:style>
+        <p:txBody>
+          <a:bodyPr rtlCol="0" anchor="ctr"/>
+          <a:lstStyle/>
+          <a:p>
+            <a:pPr algn="ctr"/>
+            <a:endParaRPr/>
+          </a:p>
+        </p:txBody>
+      </p:sp>
+      <p:sp>
+        <p:nvSpPr>
+          <p:cNvPr id="16" name="Rounded Rectangle 15"/>
+          <p:cNvSpPr/>
+          <p:nvPr/>
+        </p:nvSpPr>
+        <p:spPr>
+          <a:xfrm>
+            <a:off x="6309360" y="3520440"/>
+            <a:ext cx="2331720" cy="960120"/>
+          </a:xfrm>
+          <a:prstGeom prst="roundRect">
+            <a:avLst>
+              <a:gd name="adj" fmla="val 8000"/>
+            </a:avLst>
+          </a:prstGeom>
+          <a:solidFill>
+            <a:srgbClr val="FFFFFF"/>
+          </a:solidFill>
+          <a:ln w="28575">
+            <a:solidFill>
+              <a:srgbClr val="0E2841"/>
+            </a:solidFill>
+          </a:ln>
+          <a:effectLst/>
+        </p:spPr>
+        <p:style>
+          <a:lnRef idx="1">
+            <a:schemeClr val="accent1"/>
+          </a:lnRef>
+          <a:fillRef idx="3">
+            <a:schemeClr val="accent1"/>
+          </a:fillRef>
+          <a:effectRef idx="2">
+            <a:schemeClr val="accent1"/>
+          </a:effectRef>
+          <a:fontRef idx="minor">
+            <a:schemeClr val="lt1"/>
+          </a:fontRef>
+        </p:style>
+        <p:txBody>
+          <a:bodyPr wrap="square" lIns="109728" tIns="54864" rIns="109728" bIns="54864" rtlCol="0" anchor="ctr"/>
+          <a:lstStyle/>
+          <a:p>
+            <a:pPr algn="ctr"/>
+            <a:r>
+              <a:rPr sz="1550" b="1">
+                <a:solidFill>
+                  <a:srgbClr val="0E2841"/>
+                </a:solidFill>
+                <a:latin typeface="Arial Black"/>
+              </a:rPr>
+              <a:t>BLOCKLIST LIVE</a:t>
+            </a:r>
+          </a:p>
+          <a:p>
+            <a:pPr algn="ctr"/>
+            <a:r>
+              <a:rPr sz="950" b="0">
+                <a:solidFill>
+                  <a:srgbClr val="515E6E"/>
+                </a:solidFill>
+                <a:latin typeface="Calibri"/>
+              </a:rPr>
+              <a:t>durable · Atlas</a:t>
+            </a:r>
+          </a:p>
+        </p:txBody>
+      </p:sp>
+      <p:sp>
+        <p:nvSpPr>
+          <p:cNvPr id="17" name="Right Arrow 16"/>
+          <p:cNvSpPr/>
+          <p:nvPr/>
+        </p:nvSpPr>
+        <p:spPr>
+          <a:xfrm>
+            <a:off x="8686800" y="3822191"/>
+            <a:ext cx="347472" cy="384048"/>
+          </a:xfrm>
+          <a:prstGeom prst="rightArrow">
+            <a:avLst/>
+          </a:prstGeom>
+          <a:solidFill>
+            <a:srgbClr val="E8A13B"/>
+          </a:solidFill>
+          <a:ln>
+            <a:noFill/>
+          </a:ln>
+          <a:effectLst/>
+        </p:spPr>
+        <p:style>
+          <a:lnRef idx="1">
+            <a:schemeClr val="accent1"/>
+          </a:lnRef>
+          <a:fillRef idx="3">
+            <a:schemeClr val="accent1"/>
+          </a:fillRef>
+          <a:effectRef idx="2">
+            <a:schemeClr val="accent1"/>
+          </a:effectRef>
+          <a:fontRef idx="minor">
+            <a:schemeClr val="lt1"/>
+          </a:fontRef>
+        </p:style>
+        <p:txBody>
+          <a:bodyPr rtlCol="0" anchor="ctr"/>
+          <a:lstStyle/>
+          <a:p>
+            <a:pPr algn="ctr"/>
+            <a:endParaRPr/>
+          </a:p>
+        </p:txBody>
+      </p:sp>
+      <p:sp>
+        <p:nvSpPr>
+          <p:cNvPr id="18" name="Rounded Rectangle 17"/>
+          <p:cNvSpPr/>
+          <p:nvPr/>
+        </p:nvSpPr>
+        <p:spPr>
+          <a:xfrm>
+            <a:off x="9052560" y="3520440"/>
+            <a:ext cx="2331720" cy="960120"/>
+          </a:xfrm>
+          <a:prstGeom prst="roundRect">
+            <a:avLst>
+              <a:gd name="adj" fmla="val 8000"/>
+            </a:avLst>
+          </a:prstGeom>
+          <a:solidFill>
+            <a:srgbClr val="E8F3EA"/>
+          </a:solidFill>
+          <a:ln w="28575">
+            <a:solidFill>
+              <a:srgbClr val="2E7D32"/>
+            </a:solidFill>
+          </a:ln>
+          <a:effectLst/>
+        </p:spPr>
+        <p:style>
+          <a:lnRef idx="1">
+            <a:schemeClr val="accent1"/>
+          </a:lnRef>
+          <a:fillRef idx="3">
+            <a:schemeClr val="accent1"/>
+          </a:fillRef>
+          <a:effectRef idx="2">
+            <a:schemeClr val="accent1"/>
+          </a:effectRef>
+          <a:fontRef idx="minor">
+            <a:schemeClr val="lt1"/>
+          </a:fontRef>
+        </p:style>
+        <p:txBody>
+          <a:bodyPr wrap="square" lIns="109728" tIns="54864" rIns="109728" bIns="54864" rtlCol="0" anchor="ctr"/>
+          <a:lstStyle/>
+          <a:p>
+            <a:pPr algn="ctr"/>
+            <a:r>
+              <a:rPr sz="1550" b="1">
+                <a:solidFill>
+                  <a:srgbClr val="2E7D32"/>
+                </a:solidFill>
+                <a:latin typeface="Arial Black"/>
+              </a:rPr>
+              <a:t>EVERYONE SHIELDED</a:t>
+            </a:r>
+          </a:p>
+          <a:p>
+            <a:pPr algn="ctr"/>
+            <a:r>
+              <a:rPr sz="950" b="0">
+                <a:solidFill>
+                  <a:srgbClr val="515E6E"/>
+                </a:solidFill>
+                <a:latin typeface="Calibri"/>
+              </a:rPr>
+              <a:t>every phone, instantly</a:t>
+            </a:r>
+          </a:p>
+        </p:txBody>
+      </p:sp>
+      <p:sp>
+        <p:nvSpPr>
+          <p:cNvPr id="19" name="TextBox 18"/>
+          <p:cNvSpPr txBox="1"/>
+          <p:nvPr/>
+        </p:nvSpPr>
+        <p:spPr>
+          <a:xfrm>
+            <a:off x="822960" y="4663440"/>
+            <a:ext cx="10515600" cy="365760"/>
+          </a:xfrm>
+          <a:prstGeom prst="rect">
+            <a:avLst/>
+          </a:prstGeom>
+          <a:noFill/>
+        </p:spPr>
+        <p:txBody>
+          <a:bodyPr wrap="square" lIns="0" tIns="0" rIns="0" bIns="0">
+            <a:spAutoFit/>
+          </a:bodyPr>
+          <a:lstStyle/>
+          <a:p>
+            <a:r>
+              <a:rPr sz="1600" b="1">
+                <a:solidFill>
+                  <a:srgbClr val="156082"/>
+                </a:solidFill>
+                <a:latin typeface="Arial Black"/>
+              </a:rPr>
+              <a:t>↻ herd immunity for fraud — the shield compounds with every user</a:t>
+            </a:r>
+          </a:p>
+        </p:txBody>
+      </p:sp>
+      <p:sp>
+        <p:nvSpPr>
+          <p:cNvPr id="20" name="TextBox 19"/>
+          <p:cNvSpPr txBox="1"/>
+          <p:nvPr/>
+        </p:nvSpPr>
+        <p:spPr>
+          <a:xfrm>
+            <a:off x="822960" y="5212080"/>
+            <a:ext cx="10515600" cy="1280160"/>
+          </a:xfrm>
+          <a:prstGeom prst="rect">
+            <a:avLst/>
+          </a:prstGeom>
+          <a:noFill/>
+        </p:spPr>
+        <p:txBody>
+          <a:bodyPr wrap="square" lIns="0" tIns="0" rIns="0" bIns="0">
+            <a:spAutoFit/>
+          </a:bodyPr>
+          <a:lstStyle/>
           <a:p>
             <a:pPr>
+              <a:spcBef>
+                <a:spcPts val="1200"/>
+              </a:spcBef>
               <a:spcAft>
                 <a:spcPts val="300"/>
               </a:spcAft>
             </a:pPr>
             <a:r>
-              <a:rPr sz="1450">
+              <a:rPr sz="2000" b="1">
+                <a:solidFill>
+                  <a:srgbClr val="156082"/>
+                </a:solidFill>
+                <a:latin typeface="Arial Black"/>
+              </a:rPr>
+              <a:t>Who benefits</a:t>
+            </a:r>
+          </a:p>
+          <a:p>
+            <a:pPr>
+              <a:spcAft>
+                <a:spcPts val="400"/>
+              </a:spcAft>
+            </a:pPr>
+            <a:r>
+              <a:rPr sz="1500" b="0">
                 <a:solidFill>
                   <a:srgbClr val="0E2841"/>
                 </a:solidFill>
                 <a:latin typeface="Calibri"/>
               </a:rPr>
-              <a:t>24.51 billion UPI transactions/month (NPCI, Aug 2026) · 28.1 lakh complaints in 2025 (I4C) · ₹805 crore UPI fraud in FY26 (Parliament) — bank-side controls structurally cannot stop payments the victim authorises.</a:t>
-            </a:r>
-          </a:p>
-          <a:p>
-            <a:pPr>
-              <a:spcBef>
-                <a:spcPts val="1000"/>
-              </a:spcBef>
-              <a:spcAft>
-                <a:spcPts val="200"/>
-              </a:spcAft>
-            </a:pPr>
-            <a:r>
-              <a:rPr sz="1700" b="1">
-                <a:solidFill>
-                  <a:srgbClr val="156082"/>
-                </a:solidFill>
-                <a:latin typeface="Calibri"/>
-              </a:rPr>
-              <a:t>Dhaal's compounding shield</a:t>
-            </a:r>
-          </a:p>
-          <a:p>
-            <a:pPr>
-              <a:spcAft>
-                <a:spcPts val="300"/>
-              </a:spcAft>
-            </a:pPr>
-            <a:r>
-              <a:rPr sz="1450">
-                <a:solidFill>
-                  <a:srgbClr val="0E2841"/>
-                </a:solidFill>
-                <a:latin typeface="Calibri"/>
-              </a:rPr>
-              <a:t>One report → human verification → instant protection for every user: herd immunity for fraud — a scam burned in Jaipur today cannot work in Jodhpur tomorrow · Guardian mode protects the most-targeted group, the elderly · The recovery kit puts the golden hour in every pocket: fast 1930 reporting has already saved ₹7,130+ crore nationally.</a:t>
-            </a:r>
-          </a:p>
-          <a:p>
-            <a:pPr>
-              <a:spcBef>
-                <a:spcPts val="1000"/>
-              </a:spcBef>
-              <a:spcAft>
-                <a:spcPts val="200"/>
-              </a:spcAft>
-            </a:pPr>
-            <a:r>
-              <a:rPr sz="1700" b="1">
-                <a:solidFill>
-                  <a:srgbClr val="156082"/>
-                </a:solidFill>
-                <a:latin typeface="Calibri"/>
-              </a:rPr>
-              <a:t>Who benefits</a:t>
-            </a:r>
-          </a:p>
-          <a:p>
-            <a:pPr>
-              <a:spcAft>
-                <a:spcPts val="300"/>
-              </a:spcAft>
-            </a:pPr>
-            <a:r>
-              <a:rPr sz="1450">
-                <a:solidFill>
-                  <a:srgbClr val="0E2841"/>
-                </a:solidFill>
-                <a:latin typeface="Calibri"/>
-              </a:rPr>
-              <a:t>Every Indian with a phone (free forever) · families of elderly users · banks &amp; UPI apps (fewer reimbursements) · police cyber cells (structured, early reports).</a:t>
+              <a:t>Every Indian with a phone (free forever) · the elderly — the most-targeted group (guardian mode) · banks &amp; UPI apps (fewer reimbursements) · cyber cells (structured early reports — fast 1930 reporting has already saved ₹7,130+ crore).</a:t>
             </a:r>
           </a:p>
         </p:txBody>
@@ -6155,8 +7560,8 @@
         </p:nvSpPr>
         <p:spPr>
           <a:xfrm>
-            <a:off x="822960" y="1874519"/>
-            <a:ext cx="10515600" cy="4663440"/>
+            <a:off x="822960" y="1828800"/>
+            <a:ext cx="10515600" cy="3931920"/>
           </a:xfrm>
           <a:prstGeom prst="rect">
             <a:avLst/>
@@ -6164,113 +7569,110 @@
           <a:noFill/>
         </p:spPr>
         <p:txBody>
-          <a:bodyPr wrap="square">
+          <a:bodyPr wrap="square" lIns="0" tIns="0" rIns="0" bIns="0">
             <a:spAutoFit/>
           </a:bodyPr>
           <a:lstStyle/>
           <a:p>
             <a:pPr>
-              <a:spcBef>
-                <a:spcPts val="1000"/>
-              </a:spcBef>
               <a:spcAft>
-                <a:spcPts val="200"/>
+                <a:spcPts val="600"/>
               </a:spcAft>
             </a:pPr>
             <a:r>
-              <a:rPr sz="1700" b="1">
-                <a:solidFill>
-                  <a:srgbClr val="156082"/>
+              <a:rPr sz="2600" b="1">
+                <a:solidFill>
+                  <a:srgbClr val="0E2841"/>
+                </a:solidFill>
+                <a:latin typeface="Arial Black"/>
+              </a:rPr>
+              <a:t>Citizens: free forever. Institutions pay.</a:t>
+            </a:r>
+          </a:p>
+          <a:p>
+            <a:pPr>
+              <a:spcAft>
+                <a:spcPts val="400"/>
+              </a:spcAft>
+            </a:pPr>
+            <a:r>
+              <a:rPr sz="1500" b="0">
+                <a:solidFill>
+                  <a:srgbClr val="0E2841"/>
                 </a:solidFill>
                 <a:latin typeface="Calibri"/>
               </a:rPr>
-              <a:t>Citizens: free forever</a:t>
+              <a:t>Protection this fundamental must not be paywalled — and by construction the marginal cost per check is a fraction of a paisa (deterministic verdict; one short narration).</a:t>
             </a:r>
           </a:p>
           <a:p>
             <a:pPr>
+              <a:spcBef>
+                <a:spcPts val="1200"/>
+              </a:spcBef>
               <a:spcAft>
                 <a:spcPts val="300"/>
               </a:spcAft>
             </a:pPr>
             <a:r>
-              <a:rPr sz="1450">
+              <a:rPr sz="2000" b="1">
+                <a:solidFill>
+                  <a:srgbClr val="156082"/>
+                </a:solidFill>
+                <a:latin typeface="Arial Black"/>
+              </a:rPr>
+              <a:t>Revenue — from those who bear today's fraud cost</a:t>
+            </a:r>
+          </a:p>
+          <a:p>
+            <a:pPr>
+              <a:spcAft>
+                <a:spcPts val="400"/>
+              </a:spcAft>
+            </a:pPr>
+            <a:r>
+              <a:rPr sz="1500" b="0">
                 <a:solidFill>
                   <a:srgbClr val="0E2841"/>
                 </a:solidFill>
                 <a:latin typeface="Calibri"/>
               </a:rPr>
-              <a:t>The consumer shield stays free — protection this fundamental must not be paywalled. Cost per user is negligible by construction (deterministic engine, free-tier infra).</a:t>
+              <a:t>Risk-API + verified-blocklist licensing to banks, fintechs and UPI apps (they reimburse this fraud today; prevention is cheaper) · pre-payment check SDK inside UPI apps — the check runs before the PAY button renders · deployment partnerships: state cyber cells &amp; the CSC network.</a:t>
             </a:r>
           </a:p>
           <a:p>
             <a:pPr>
               <a:spcBef>
-                <a:spcPts val="1000"/>
+                <a:spcPts val="1200"/>
               </a:spcBef>
-              <a:spcAft>
-                <a:spcPts val="200"/>
-              </a:spcAft>
-            </a:pPr>
-            <a:r>
-              <a:rPr sz="1700" b="1">
-                <a:solidFill>
-                  <a:srgbClr val="156082"/>
-                </a:solidFill>
-                <a:latin typeface="Calibri"/>
-              </a:rPr>
-              <a:t>Revenue: the institutions that bear today's fraud cost</a:t>
-            </a:r>
-          </a:p>
-          <a:p>
-            <a:pPr>
               <a:spcAft>
                 <a:spcPts val="300"/>
               </a:spcAft>
             </a:pPr>
             <a:r>
-              <a:rPr sz="1450">
+              <a:rPr sz="2000" b="1">
+                <a:solidFill>
+                  <a:srgbClr val="156082"/>
+                </a:solidFill>
+                <a:latin typeface="Arial Black"/>
+              </a:rPr>
+              <a:t>Sustainability &amp; moat</a:t>
+            </a:r>
+          </a:p>
+          <a:p>
+            <a:pPr>
+              <a:spcAft>
+                <a:spcPts val="400"/>
+              </a:spcAft>
+            </a:pPr>
+            <a:r>
+              <a:rPr sz="1500" b="0">
                 <a:solidFill>
                   <a:srgbClr val="0E2841"/>
                 </a:solidFill>
                 <a:latin typeface="Calibri"/>
               </a:rPr>
-              <a:t>Risk-API + verified-blocklist licensing to banks, fintechs and UPI apps (they reimburse this fraud today; prevention is cheaper) · a pre-payment check SDK inside UPI apps — the check runs before the PAY button renders · deployment partnerships: state cyber cells &amp; the CSC network (assisted mode).</a:t>
-            </a:r>
-          </a:p>
-          <a:p>
-            <a:pPr>
-              <a:spcBef>
-                <a:spcPts val="1000"/>
-              </a:spcBef>
-              <a:spcAft>
-                <a:spcPts val="200"/>
-              </a:spcAft>
-            </a:pPr>
-            <a:r>
-              <a:rPr sz="1700" b="1">
-                <a:solidFill>
-                  <a:srgbClr val="156082"/>
-                </a:solidFill>
-                <a:latin typeface="Calibri"/>
-              </a:rPr>
-              <a:t>Sustainability &amp; moat</a:t>
-            </a:r>
-          </a:p>
-          <a:p>
-            <a:pPr>
-              <a:spcAft>
-                <a:spcPts val="300"/>
-              </a:spcAft>
-            </a:pPr>
-            <a:r>
-              <a:rPr sz="1450">
-                <a:solidFill>
-                  <a:srgbClr val="0E2841"/>
-                </a:solidFill>
-                <a:latin typeface="Calibri"/>
-              </a:rPr>
-              <a:t>The community blocklist compounds with every user — a network effect no new entrant starts with · Roadmap: one-tap 1930/I4C hand-off, 10+ Indic languages via the same Sarvam pipeline (single parameter), auto-verify thresholds for moderation at scale.</a:t>
+              <a:t>The community blocklist compounds with every user — a network effect no new entrant starts with · Roadmap: one-tap 1930/I4C hand-off · 10+ Indic languages via the same Sarvam pipeline (one parameter) · auto-verify thresholds for moderation at scale.</a:t>
             </a:r>
           </a:p>
         </p:txBody>
@@ -6608,8 +8010,8 @@
         </p:nvSpPr>
         <p:spPr>
           <a:xfrm>
-            <a:off x="822960" y="1874519"/>
-            <a:ext cx="10515600" cy="4663440"/>
+            <a:off x="822960" y="1828800"/>
+            <a:ext cx="10515600" cy="4572000"/>
           </a:xfrm>
           <a:prstGeom prst="rect">
             <a:avLst/>
@@ -6617,37 +8019,37 @@
           <a:noFill/>
         </p:spPr>
         <p:txBody>
-          <a:bodyPr wrap="square">
+          <a:bodyPr wrap="square" lIns="0" tIns="0" rIns="0" bIns="0">
             <a:spAutoFit/>
           </a:bodyPr>
           <a:lstStyle/>
           <a:p>
             <a:pPr>
               <a:spcBef>
-                <a:spcPts val="1000"/>
+                <a:spcPts val="1200"/>
               </a:spcBef>
-              <a:spcAft>
-                <a:spcPts val="200"/>
-              </a:spcAft>
-            </a:pPr>
-            <a:r>
-              <a:rPr sz="1700" b="1">
-                <a:solidFill>
-                  <a:srgbClr val="156082"/>
-                </a:solidFill>
-                <a:latin typeface="Calibri"/>
-              </a:rPr>
-              <a:t>Data sources (verified 11 Sep 2026)</a:t>
-            </a:r>
-          </a:p>
-          <a:p>
-            <a:pPr>
               <a:spcAft>
                 <a:spcPts val="300"/>
               </a:spcAft>
             </a:pPr>
             <a:r>
-              <a:rPr sz="1450">
+              <a:rPr sz="2000" b="1">
+                <a:solidFill>
+                  <a:srgbClr val="156082"/>
+                </a:solidFill>
+                <a:latin typeface="Arial Black"/>
+              </a:rPr>
+              <a:t>Data sources (verified 11 Sep 2026)</a:t>
+            </a:r>
+          </a:p>
+          <a:p>
+            <a:pPr>
+              <a:spcAft>
+                <a:spcPts val="400"/>
+              </a:spcAft>
+            </a:pPr>
+            <a:r>
+              <a:rPr sz="1500" b="0">
                 <a:solidFill>
                   <a:srgbClr val="0E2841"/>
                 </a:solidFill>
@@ -6659,71 +8061,71 @@
           <a:p>
             <a:pPr>
               <a:spcBef>
-                <a:spcPts val="1000"/>
+                <a:spcPts val="1200"/>
               </a:spcBef>
-              <a:spcAft>
-                <a:spcPts val="200"/>
-              </a:spcAft>
-            </a:pPr>
-            <a:r>
-              <a:rPr sz="1700" b="1">
-                <a:solidFill>
-                  <a:srgbClr val="156082"/>
-                </a:solidFill>
-                <a:latin typeface="Calibri"/>
-              </a:rPr>
-              <a:t>Domain research</a:t>
-            </a:r>
-          </a:p>
-          <a:p>
-            <a:pPr>
               <a:spcAft>
                 <a:spcPts val="300"/>
               </a:spcAft>
             </a:pPr>
             <a:r>
-              <a:rPr sz="1450">
+              <a:rPr sz="2000" b="1">
+                <a:solidFill>
+                  <a:srgbClr val="156082"/>
+                </a:solidFill>
+                <a:latin typeface="Arial Black"/>
+              </a:rPr>
+              <a:t>Domain research</a:t>
+            </a:r>
+          </a:p>
+          <a:p>
+            <a:pPr>
+              <a:spcAft>
+                <a:spcPts val="400"/>
+              </a:spcAft>
+            </a:pPr>
+            <a:r>
+              <a:rPr sz="1500" b="0">
                 <a:solidFill>
                   <a:srgbClr val="0E2841"/>
                 </a:solidFill>
                 <a:latin typeface="Calibri"/>
               </a:rPr>
-              <a:t>Scam-script corpus built from I4C advisories &amp; documented fraud patterns: digital arrest, KYC-expiry, collect-request refund bait, OLX/army advance, job-task &amp; loan-fee scams, electricity disconnection · UPI deep-link (upi://) collect-vs-pay semantics · NPCI PSP handle registry for VPA verification.</a:t>
+              <a:t>Scam-script corpus from I4C advisories &amp; documented fraud patterns: digital arrest, KYC-expiry, collect-request refund bait, OLX/army advance, job-task &amp; loan-fee scams, electricity disconnection, victim-voiced coercion · upi:// deep-link collect-vs-pay semantics · NPCI PSP handle registry for VPA verification.</a:t>
             </a:r>
           </a:p>
           <a:p>
             <a:pPr>
               <a:spcBef>
-                <a:spcPts val="1000"/>
+                <a:spcPts val="1200"/>
               </a:spcBef>
-              <a:spcAft>
-                <a:spcPts val="200"/>
-              </a:spcAft>
-            </a:pPr>
-            <a:r>
-              <a:rPr sz="1700" b="1">
-                <a:solidFill>
-                  <a:srgbClr val="156082"/>
-                </a:solidFill>
-                <a:latin typeface="Calibri"/>
-              </a:rPr>
-              <a:t>Build</a:t>
-            </a:r>
-          </a:p>
-          <a:p>
-            <a:pPr>
               <a:spcAft>
                 <a:spcPts val="300"/>
               </a:spcAft>
             </a:pPr>
             <a:r>
-              <a:rPr sz="1450">
+              <a:rPr sz="2000" b="1">
+                <a:solidFill>
+                  <a:srgbClr val="156082"/>
+                </a:solidFill>
+                <a:latin typeface="Arial Black"/>
+              </a:rPr>
+              <a:t>Build</a:t>
+            </a:r>
+          </a:p>
+          <a:p>
+            <a:pPr>
+              <a:spcAft>
+                <a:spcPts val="400"/>
+              </a:spcAft>
+            </a:pPr>
+            <a:r>
+              <a:rPr sz="1500" b="0">
                 <a:solidFill>
                   <a:srgbClr val="0E2841"/>
                 </a:solidFill>
                 <a:latin typeface="Calibri"/>
               </a:rPr>
-              <a:t>Live app: dhaal-delta.vercel.app · API: dhaal-api.vercel.app · Repository: github.com/SaudSatopay/MUJ-HACKX (49 automated checks, full docs &amp; contracts) · Sponsor tech used in production: Sarvam AI (Saarika ASR + Bulbul TTS), MongoDB Atlas.</a:t>
+              <a:t>Live app: dhaal-delta.vercel.app · API: dhaal-api.vercel.app · Repo: github.com/SaudSatopay/MUJ-HACKX (49 automated checks, full contracts &amp; docs) · Sponsor tech in production: Sarvam AI (Saarika ASR + Bulbul TTS), MongoDB Atlas.</a:t>
             </a:r>
           </a:p>
         </p:txBody>
